--- a/decks/alert-design/alert-design.pptx
+++ b/decks/alert-design/alert-design.pptx
@@ -1210,6 +1210,13 @@
 <file path=ppt/slides/slide1.xml><?xml version="1.0" encoding="utf-8"?>
 <p:sld xmlns:a="http://schemas.openxmlformats.org/drawingml/2006/main" xmlns:r="http://schemas.openxmlformats.org/officeDocument/2006/relationships" xmlns:p="http://schemas.openxmlformats.org/presentationml/2006/main">
   <p:cSld name="Slide 1">
+    <p:bg>
+      <p:bgPr>
+        <a:solidFill>
+          <a:srgbClr val="FFFFFF"/>
+        </a:solidFill>
+      </p:bgPr>
+    </p:bg>
     <p:spTree>
       <p:nvGrpSpPr>
         <p:cNvPr id="1" name=""/>
@@ -1224,30 +1231,293 @@
           <a:chExt cx="0" cy="0"/>
         </a:xfrm>
       </p:grpSpPr>
-      <p:pic>
-        <p:nvPicPr>
-          <p:cNvPr id="2" name="Image 0" descr="/tmp/slide-1787840609291-1g26p7m60rx.png">    </p:cNvPr>
-          <p:cNvPicPr>
-            <a:picLocks noChangeAspect="1"/>
-          </p:cNvPicPr>
-          <p:nvPr/>
-        </p:nvPicPr>
-        <p:blipFill>
-          <a:blip r:embed="rId1"/>
-          <a:stretch>
-            <a:fillRect/>
-          </a:stretch>
-        </p:blipFill>
-        <p:spPr>
-          <a:xfrm>
-            <a:off x="0" y="0"/>
-            <a:ext cx="12188952" cy="6858000"/>
-          </a:xfrm>
-          <a:prstGeom prst="rect">
-            <a:avLst/>
-          </a:prstGeom>
-        </p:spPr>
-      </p:pic>
+      <p:sp>
+        <p:nvSpPr>
+          <p:cNvPr id="2" name="Text 0"/>
+          <p:cNvSpPr/>
+          <p:nvPr/>
+        </p:nvSpPr>
+        <p:spPr>
+          <a:xfrm>
+            <a:off x="643174" y="508000"/>
+            <a:ext cx="11120657" cy="236934"/>
+          </a:xfrm>
+          <a:prstGeom prst="rect">
+            <a:avLst/>
+          </a:prstGeom>
+          <a:noFill/>
+          <a:ln/>
+        </p:spPr>
+        <p:txBody>
+          <a:bodyPr wrap="square" lIns="0" tIns="0" rIns="0" bIns="0" rtlCol="0" anchor="t"/>
+          <a:lstStyle/>
+          <a:p>
+            <a:pPr algn="l" indent="0" marL="0">
+              <a:lnSpc>
+                <a:spcPts val="1866"/>
+              </a:lnSpc>
+              <a:spcAft>
+                <a:spcPts val="800"/>
+              </a:spcAft>
+              <a:buNone/>
+            </a:pPr>
+            <a:r>
+              <a:rPr lang="en-US" sz="1333" b="1" dirty="0">
+                <a:solidFill>
+                  <a:srgbClr val="3D3D3D"/>
+                </a:solidFill>
+                <a:latin typeface="Arimo" pitchFamily="34" charset="0"/>
+                <a:ea typeface="Arimo" pitchFamily="34" charset="-122"/>
+                <a:cs typeface="Arimo" pitchFamily="34" charset="-120"/>
+              </a:rPr>
+              <a:t>RISK REVIEW · ON-CALL</a:t>
+            </a:r>
+            <a:endParaRPr lang="en-US" sz="1333" dirty="0"/>
+          </a:p>
+        </p:txBody>
+      </p:sp>
+      <p:sp>
+        <p:nvSpPr>
+          <p:cNvPr id="3" name="Text 1"/>
+          <p:cNvSpPr/>
+          <p:nvPr/>
+        </p:nvSpPr>
+        <p:spPr>
+          <a:xfrm>
+            <a:off x="643174" y="846534"/>
+            <a:ext cx="10902605" cy="50800"/>
+          </a:xfrm>
+          <a:prstGeom prst="rect">
+            <a:avLst/>
+          </a:prstGeom>
+          <a:solidFill>
+            <a:srgbClr val="0A0A0A"/>
+          </a:solidFill>
+          <a:ln/>
+        </p:spPr>
+        <p:txBody>
+          <a:bodyPr wrap="square" rtlCol="0" anchor="ctr"/>
+          <a:lstStyle/>
+          <a:p>
+            <a:pPr indent="0" marL="0">
+              <a:buNone/>
+            </a:pPr>
+            <a:endParaRPr lang="en-US" dirty="0"/>
+          </a:p>
+        </p:txBody>
+      </p:sp>
+      <p:sp>
+        <p:nvSpPr>
+          <p:cNvPr id="4" name="Text 2"/>
+          <p:cNvSpPr/>
+          <p:nvPr/>
+        </p:nvSpPr>
+        <p:spPr>
+          <a:xfrm>
+            <a:off x="643174" y="1477169"/>
+            <a:ext cx="11120657" cy="1625203"/>
+          </a:xfrm>
+          <a:prstGeom prst="rect">
+            <a:avLst/>
+          </a:prstGeom>
+          <a:noFill/>
+          <a:ln/>
+        </p:spPr>
+        <p:txBody>
+          <a:bodyPr wrap="square" lIns="0" tIns="0" rIns="0" bIns="0" rtlCol="0" anchor="t"/>
+          <a:lstStyle/>
+          <a:p>
+            <a:pPr algn="l" indent="0" marL="0">
+              <a:lnSpc>
+                <a:spcPts val="6399"/>
+              </a:lnSpc>
+              <a:spcAft>
+                <a:spcPts val="3466"/>
+              </a:spcAft>
+              <a:buNone/>
+            </a:pPr>
+            <a:r>
+              <a:rPr lang="en-US" sz="5333" dirty="0">
+                <a:solidFill>
+                  <a:srgbClr val="0A0A0A"/>
+                </a:solidFill>
+                <a:latin typeface="Arimo" pitchFamily="34" charset="0"/>
+                <a:ea typeface="Arimo" pitchFamily="34" charset="-122"/>
+                <a:cs typeface="Arimo" pitchFamily="34" charset="-120"/>
+              </a:rPr>
+              <a:t>Alert design:</a:t>
+            </a:r>
+            <a:endParaRPr lang="en-US" sz="5333" dirty="0"/>
+          </a:p>
+          <a:p>
+            <a:pPr algn="l" indent="0" marL="0">
+              <a:lnSpc>
+                <a:spcPts val="6399"/>
+              </a:lnSpc>
+              <a:spcAft>
+                <a:spcPts val="3466"/>
+              </a:spcAft>
+              <a:buNone/>
+            </a:pPr>
+            <a:r>
+              <a:rPr lang="en-US" sz="5333" dirty="0">
+                <a:solidFill>
+                  <a:srgbClr val="0A0A0A"/>
+                </a:solidFill>
+                <a:latin typeface="Arimo" pitchFamily="34" charset="0"/>
+                <a:ea typeface="Arimo" pitchFamily="34" charset="-122"/>
+                <a:cs typeface="Arimo" pitchFamily="34" charset="-120"/>
+              </a:rPr>
+              <a:t>what deserves a page</a:t>
+            </a:r>
+            <a:endParaRPr lang="en-US" sz="5333" dirty="0"/>
+          </a:p>
+        </p:txBody>
+      </p:sp>
+      <p:sp>
+        <p:nvSpPr>
+          <p:cNvPr id="5" name="Text 3"/>
+          <p:cNvSpPr/>
+          <p:nvPr/>
+        </p:nvSpPr>
+        <p:spPr>
+          <a:xfrm>
+            <a:off x="643174" y="3542506"/>
+            <a:ext cx="10902605" cy="1308497"/>
+          </a:xfrm>
+          <a:prstGeom prst="rect">
+            <a:avLst/>
+          </a:prstGeom>
+          <a:solidFill>
+            <a:srgbClr val="0A0A0A"/>
+          </a:solidFill>
+          <a:ln/>
+        </p:spPr>
+        <p:txBody>
+          <a:bodyPr wrap="square" rtlCol="0" anchor="ctr"/>
+          <a:lstStyle/>
+          <a:p>
+            <a:pPr indent="0" marL="0">
+              <a:buNone/>
+            </a:pPr>
+            <a:endParaRPr lang="en-US" dirty="0"/>
+          </a:p>
+        </p:txBody>
+      </p:sp>
+      <p:sp>
+        <p:nvSpPr>
+          <p:cNvPr id="6" name="Text 4"/>
+          <p:cNvSpPr/>
+          <p:nvPr/>
+        </p:nvSpPr>
+        <p:spPr>
+          <a:xfrm>
+            <a:off x="913973" y="3779441"/>
+            <a:ext cx="10568226" cy="834628"/>
+          </a:xfrm>
+          <a:prstGeom prst="rect">
+            <a:avLst/>
+          </a:prstGeom>
+          <a:noFill/>
+          <a:ln/>
+        </p:spPr>
+        <p:txBody>
+          <a:bodyPr wrap="square" lIns="0" tIns="0" rIns="0" bIns="0" rtlCol="0" anchor="t"/>
+          <a:lstStyle/>
+          <a:p>
+            <a:pPr algn="l" indent="0" marL="0">
+              <a:lnSpc>
+                <a:spcPts val="3286"/>
+              </a:lnSpc>
+              <a:buNone/>
+            </a:pPr>
+            <a:r>
+              <a:rPr lang="en-US" sz="2266" dirty="0">
+                <a:solidFill>
+                  <a:srgbClr val="FFFFFF"/>
+                </a:solidFill>
+                <a:latin typeface="Arimo" pitchFamily="34" charset="0"/>
+                <a:ea typeface="Arimo" pitchFamily="34" charset="-122"/>
+                <a:cs typeface="Arimo" pitchFamily="34" charset="-120"/>
+              </a:rPr>
+              <a:t>A page wakes a human. The bar is not whether the alert is true. The bar is whether it is worth someone's night.</a:t>
+            </a:r>
+            <a:endParaRPr lang="en-US" sz="2266" dirty="0"/>
+          </a:p>
+        </p:txBody>
+      </p:sp>
+      <p:sp>
+        <p:nvSpPr>
+          <p:cNvPr id="7" name="Text 5"/>
+          <p:cNvSpPr/>
+          <p:nvPr/>
+        </p:nvSpPr>
+        <p:spPr>
+          <a:xfrm>
+            <a:off x="643174" y="5769570"/>
+            <a:ext cx="10902605" cy="25400"/>
+          </a:xfrm>
+          <a:prstGeom prst="rect">
+            <a:avLst/>
+          </a:prstGeom>
+          <a:solidFill>
+            <a:srgbClr val="0A0A0A"/>
+          </a:solidFill>
+          <a:ln/>
+        </p:spPr>
+        <p:txBody>
+          <a:bodyPr wrap="square" rtlCol="0" anchor="ctr"/>
+          <a:lstStyle/>
+          <a:p>
+            <a:pPr indent="0" marL="0">
+              <a:buNone/>
+            </a:pPr>
+            <a:endParaRPr lang="en-US" dirty="0"/>
+          </a:p>
+        </p:txBody>
+      </p:sp>
+      <p:sp>
+        <p:nvSpPr>
+          <p:cNvPr id="8" name="Text 6"/>
+          <p:cNvSpPr/>
+          <p:nvPr/>
+        </p:nvSpPr>
+        <p:spPr>
+          <a:xfrm>
+            <a:off x="643174" y="5794970"/>
+            <a:ext cx="11120657" cy="419695"/>
+          </a:xfrm>
+          <a:prstGeom prst="rect">
+            <a:avLst/>
+          </a:prstGeom>
+          <a:noFill/>
+          <a:ln/>
+        </p:spPr>
+        <p:txBody>
+          <a:bodyPr wrap="square" lIns="0" tIns="135450" rIns="0" bIns="0" rtlCol="0" anchor="t"/>
+          <a:lstStyle/>
+          <a:p>
+            <a:pPr algn="l" indent="0" marL="0">
+              <a:lnSpc>
+                <a:spcPts val="2240"/>
+              </a:lnSpc>
+              <a:buNone/>
+            </a:pPr>
+            <a:r>
+              <a:rPr lang="en-US" sz="1600" b="1" dirty="0">
+                <a:solidFill>
+                  <a:srgbClr val="3D3D3D"/>
+                </a:solidFill>
+                <a:latin typeface="Arimo" pitchFamily="34" charset="0"/>
+                <a:ea typeface="Arimo" pitchFamily="34" charset="-122"/>
+                <a:cs typeface="Arimo" pitchFamily="34" charset="-120"/>
+              </a:rPr>
+              <a:t>PRESENTER · TEAM</a:t>
+            </a:r>
+            <a:endParaRPr lang="en-US" sz="1600" dirty="0"/>
+          </a:p>
+        </p:txBody>
+      </p:sp>
     </p:spTree>
   </p:cSld>
   <p:clrMapOvr>
@@ -1259,6 +1529,13 @@
 <file path=ppt/slides/slide2.xml><?xml version="1.0" encoding="utf-8"?>
 <p:sld xmlns:a="http://schemas.openxmlformats.org/drawingml/2006/main" xmlns:r="http://schemas.openxmlformats.org/officeDocument/2006/relationships" xmlns:p="http://schemas.openxmlformats.org/presentationml/2006/main">
   <p:cSld name="Slide 2">
+    <p:bg>
+      <p:bgPr>
+        <a:solidFill>
+          <a:srgbClr val="FFFFFF"/>
+        </a:solidFill>
+      </p:bgPr>
+    </p:bg>
     <p:spTree>
       <p:nvGrpSpPr>
         <p:cNvPr id="1" name=""/>
@@ -1273,30 +1550,926 @@
           <a:chExt cx="0" cy="0"/>
         </a:xfrm>
       </p:grpSpPr>
-      <p:pic>
-        <p:nvPicPr>
-          <p:cNvPr id="2" name="Image 0" descr="/tmp/slide-1787840609564-cpuuwx3ksmn.png">    </p:cNvPr>
-          <p:cNvPicPr>
-            <a:picLocks noChangeAspect="1"/>
-          </p:cNvPicPr>
-          <p:nvPr/>
-        </p:nvPicPr>
-        <p:blipFill>
-          <a:blip r:embed="rId1"/>
-          <a:stretch>
-            <a:fillRect/>
-          </a:stretch>
-        </p:blipFill>
-        <p:spPr>
-          <a:xfrm>
-            <a:off x="0" y="0"/>
-            <a:ext cx="12188952" cy="6858000"/>
-          </a:xfrm>
-          <a:prstGeom prst="rect">
-            <a:avLst/>
-          </a:prstGeom>
-        </p:spPr>
-      </p:pic>
+      <p:sp>
+        <p:nvSpPr>
+          <p:cNvPr id="2" name="Text 0"/>
+          <p:cNvSpPr/>
+          <p:nvPr/>
+        </p:nvSpPr>
+        <p:spPr>
+          <a:xfrm>
+            <a:off x="643174" y="508000"/>
+            <a:ext cx="11120657" cy="236934"/>
+          </a:xfrm>
+          <a:prstGeom prst="rect">
+            <a:avLst/>
+          </a:prstGeom>
+          <a:noFill/>
+          <a:ln/>
+        </p:spPr>
+        <p:txBody>
+          <a:bodyPr wrap="square" lIns="0" tIns="0" rIns="0" bIns="0" rtlCol="0" anchor="t"/>
+          <a:lstStyle/>
+          <a:p>
+            <a:pPr algn="l" indent="0" marL="0">
+              <a:lnSpc>
+                <a:spcPts val="1866"/>
+              </a:lnSpc>
+              <a:spcAft>
+                <a:spcPts val="800"/>
+              </a:spcAft>
+              <a:buNone/>
+            </a:pPr>
+            <a:r>
+              <a:rPr lang="en-US" sz="1333" b="1" dirty="0">
+                <a:solidFill>
+                  <a:srgbClr val="3D3D3D"/>
+                </a:solidFill>
+                <a:latin typeface="Arimo" pitchFamily="34" charset="0"/>
+                <a:ea typeface="Arimo" pitchFamily="34" charset="-122"/>
+                <a:cs typeface="Arimo" pitchFamily="34" charset="-120"/>
+              </a:rPr>
+              <a:t>02 · DESTINATIONS</a:t>
+            </a:r>
+            <a:endParaRPr lang="en-US" sz="1333" dirty="0"/>
+          </a:p>
+        </p:txBody>
+      </p:sp>
+      <p:sp>
+        <p:nvSpPr>
+          <p:cNvPr id="3" name="Text 1"/>
+          <p:cNvSpPr/>
+          <p:nvPr/>
+        </p:nvSpPr>
+        <p:spPr>
+          <a:xfrm>
+            <a:off x="643174" y="846534"/>
+            <a:ext cx="11120657" cy="487561"/>
+          </a:xfrm>
+          <a:prstGeom prst="rect">
+            <a:avLst/>
+          </a:prstGeom>
+          <a:noFill/>
+          <a:ln/>
+        </p:spPr>
+        <p:txBody>
+          <a:bodyPr wrap="square" lIns="0" tIns="0" rIns="0" bIns="0" rtlCol="0" anchor="t"/>
+          <a:lstStyle/>
+          <a:p>
+            <a:pPr algn="l" indent="0" marL="0">
+              <a:lnSpc>
+                <a:spcPts val="3840"/>
+              </a:lnSpc>
+              <a:spcAft>
+                <a:spcPts val="1067"/>
+              </a:spcAft>
+              <a:buNone/>
+            </a:pPr>
+            <a:r>
+              <a:rPr lang="en-US" sz="3200" b="1" dirty="0">
+                <a:solidFill>
+                  <a:srgbClr val="0A0A0A"/>
+                </a:solidFill>
+                <a:latin typeface="Arimo" pitchFamily="34" charset="0"/>
+                <a:ea typeface="Arimo" pitchFamily="34" charset="-122"/>
+                <a:cs typeface="Arimo" pitchFamily="34" charset="-120"/>
+              </a:rPr>
+              <a:t>Three destinations, and only one wakes anyone</a:t>
+            </a:r>
+            <a:endParaRPr lang="en-US" sz="3200" dirty="0"/>
+          </a:p>
+        </p:txBody>
+      </p:sp>
+      <p:sp>
+        <p:nvSpPr>
+          <p:cNvPr id="4" name="Text 2"/>
+          <p:cNvSpPr/>
+          <p:nvPr/>
+        </p:nvSpPr>
+        <p:spPr>
+          <a:xfrm>
+            <a:off x="643174" y="1469430"/>
+            <a:ext cx="11120657" cy="331986"/>
+          </a:xfrm>
+          <a:prstGeom prst="rect">
+            <a:avLst/>
+          </a:prstGeom>
+          <a:noFill/>
+          <a:ln/>
+        </p:spPr>
+        <p:txBody>
+          <a:bodyPr wrap="square" lIns="0" tIns="0" rIns="0" bIns="0" rtlCol="0" anchor="t"/>
+          <a:lstStyle/>
+          <a:p>
+            <a:pPr algn="l" indent="0" marL="0">
+              <a:lnSpc>
+                <a:spcPts val="2613"/>
+              </a:lnSpc>
+              <a:spcAft>
+                <a:spcPts val="1600"/>
+              </a:spcAft>
+              <a:buNone/>
+            </a:pPr>
+            <a:r>
+              <a:rPr lang="en-US" sz="1866" dirty="0">
+                <a:solidFill>
+                  <a:srgbClr val="3D3D3D"/>
+                </a:solidFill>
+                <a:latin typeface="Arimo" pitchFamily="34" charset="0"/>
+                <a:ea typeface="Arimo" pitchFamily="34" charset="-122"/>
+                <a:cs typeface="Arimo" pitchFamily="34" charset="-120"/>
+              </a:rPr>
+              <a:t>Every alert lands in one of three places. Most of the pain is landing wrong.</a:t>
+            </a:r>
+            <a:endParaRPr lang="en-US" sz="1866" dirty="0"/>
+          </a:p>
+        </p:txBody>
+      </p:sp>
+      <p:sp>
+        <p:nvSpPr>
+          <p:cNvPr id="5" name="Text 3"/>
+          <p:cNvSpPr/>
+          <p:nvPr/>
+        </p:nvSpPr>
+        <p:spPr>
+          <a:xfrm>
+            <a:off x="643174" y="2004616"/>
+            <a:ext cx="10902605" cy="50800"/>
+          </a:xfrm>
+          <a:prstGeom prst="rect">
+            <a:avLst/>
+          </a:prstGeom>
+          <a:solidFill>
+            <a:srgbClr val="0A0A0A"/>
+          </a:solidFill>
+          <a:ln/>
+        </p:spPr>
+        <p:txBody>
+          <a:bodyPr wrap="square" rtlCol="0" anchor="ctr"/>
+          <a:lstStyle/>
+          <a:p>
+            <a:pPr indent="0" marL="0">
+              <a:buNone/>
+            </a:pPr>
+            <a:endParaRPr lang="en-US" dirty="0"/>
+          </a:p>
+        </p:txBody>
+      </p:sp>
+      <p:sp>
+        <p:nvSpPr>
+          <p:cNvPr id="6" name="Text 4"/>
+          <p:cNvSpPr/>
+          <p:nvPr/>
+        </p:nvSpPr>
+        <p:spPr>
+          <a:xfrm>
+            <a:off x="784735" y="3155752"/>
+            <a:ext cx="975759" cy="236934"/>
+          </a:xfrm>
+          <a:prstGeom prst="rect">
+            <a:avLst/>
+          </a:prstGeom>
+          <a:noFill/>
+          <a:ln/>
+        </p:spPr>
+        <p:txBody>
+          <a:bodyPr wrap="square" lIns="0" tIns="0" rIns="0" bIns="0" rtlCol="0" anchor="t"/>
+          <a:lstStyle/>
+          <a:p>
+            <a:pPr algn="r" indent="0" marL="0">
+              <a:lnSpc>
+                <a:spcPts val="1866"/>
+              </a:lnSpc>
+              <a:buNone/>
+            </a:pPr>
+            <a:r>
+              <a:rPr lang="en-US" sz="1333" b="1" dirty="0">
+                <a:solidFill>
+                  <a:srgbClr val="767676"/>
+                </a:solidFill>
+                <a:latin typeface="Arimo" pitchFamily="34" charset="0"/>
+                <a:ea typeface="Arimo" pitchFamily="34" charset="-122"/>
+                <a:cs typeface="Arimo" pitchFamily="34" charset="-120"/>
+              </a:rPr>
+              <a:t>PURPOSE</a:t>
+            </a:r>
+            <a:endParaRPr lang="en-US" sz="1333" dirty="0"/>
+          </a:p>
+        </p:txBody>
+      </p:sp>
+      <p:sp>
+        <p:nvSpPr>
+          <p:cNvPr id="7" name="Shape 5"/>
+          <p:cNvSpPr/>
+          <p:nvPr/>
+        </p:nvSpPr>
+        <p:spPr>
+          <a:xfrm>
+            <a:off x="643174" y="4325541"/>
+            <a:ext cx="1117321" cy="0"/>
+          </a:xfrm>
+          <a:prstGeom prst="line">
+            <a:avLst/>
+          </a:prstGeom>
+          <a:noFill/>
+          <a:ln w="25397">
+            <a:solidFill>
+              <a:srgbClr val="0A0A0A"/>
+            </a:solidFill>
+            <a:prstDash val="solid"/>
+          </a:ln>
+        </p:spPr>
+      </p:sp>
+      <p:sp>
+        <p:nvSpPr>
+          <p:cNvPr id="8" name="Text 6"/>
+          <p:cNvSpPr/>
+          <p:nvPr/>
+        </p:nvSpPr>
+        <p:spPr>
+          <a:xfrm>
+            <a:off x="620827" y="4558308"/>
+            <a:ext cx="1139667" cy="473869"/>
+          </a:xfrm>
+          <a:prstGeom prst="rect">
+            <a:avLst/>
+          </a:prstGeom>
+          <a:noFill/>
+          <a:ln/>
+        </p:spPr>
+        <p:txBody>
+          <a:bodyPr wrap="square" lIns="0" tIns="0" rIns="0" bIns="0" rtlCol="0" anchor="t"/>
+          <a:lstStyle/>
+          <a:p>
+            <a:pPr algn="r" indent="0" marL="0">
+              <a:lnSpc>
+                <a:spcPts val="1866"/>
+              </a:lnSpc>
+              <a:buNone/>
+            </a:pPr>
+            <a:r>
+              <a:rPr lang="en-US" sz="1333" b="1" dirty="0">
+                <a:solidFill>
+                  <a:srgbClr val="767676"/>
+                </a:solidFill>
+                <a:latin typeface="Arimo" pitchFamily="34" charset="0"/>
+                <a:ea typeface="Arimo" pitchFamily="34" charset="-122"/>
+                <a:cs typeface="Arimo" pitchFamily="34" charset="-120"/>
+              </a:rPr>
+              <a:t>FAILURE MODE</a:t>
+            </a:r>
+            <a:endParaRPr lang="en-US" sz="1333" dirty="0"/>
+          </a:p>
+        </p:txBody>
+      </p:sp>
+      <p:sp>
+        <p:nvSpPr>
+          <p:cNvPr id="9" name="Shape 7"/>
+          <p:cNvSpPr/>
+          <p:nvPr/>
+        </p:nvSpPr>
+        <p:spPr>
+          <a:xfrm>
+            <a:off x="2166793" y="2916634"/>
+            <a:ext cx="2573488" cy="0"/>
+          </a:xfrm>
+          <a:prstGeom prst="line">
+            <a:avLst/>
+          </a:prstGeom>
+          <a:noFill/>
+          <a:ln w="38095">
+            <a:solidFill>
+              <a:srgbClr val="FFFFFF"/>
+            </a:solidFill>
+            <a:prstDash val="solid"/>
+          </a:ln>
+        </p:spPr>
+      </p:sp>
+      <p:sp>
+        <p:nvSpPr>
+          <p:cNvPr id="10" name="Text 8"/>
+          <p:cNvSpPr/>
+          <p:nvPr/>
+        </p:nvSpPr>
+        <p:spPr>
+          <a:xfrm>
+            <a:off x="2166793" y="2362200"/>
+            <a:ext cx="1092518" cy="465534"/>
+          </a:xfrm>
+          <a:prstGeom prst="rect">
+            <a:avLst/>
+          </a:prstGeom>
+          <a:noFill/>
+          <a:ln/>
+        </p:spPr>
+        <p:txBody>
+          <a:bodyPr wrap="square" lIns="0" tIns="0" rIns="0" bIns="0" rtlCol="0" anchor="t"/>
+          <a:lstStyle/>
+          <a:p>
+            <a:pPr algn="l" indent="0" marL="0">
+              <a:lnSpc>
+                <a:spcPts val="3666"/>
+              </a:lnSpc>
+              <a:buNone/>
+            </a:pPr>
+            <a:r>
+              <a:rPr lang="en-US" sz="2933" b="1" dirty="0">
+                <a:solidFill>
+                  <a:srgbClr val="FFFFFF"/>
+                </a:solidFill>
+                <a:latin typeface="Arimo" pitchFamily="34" charset="0"/>
+                <a:ea typeface="Arimo" pitchFamily="34" charset="-122"/>
+                <a:cs typeface="Arimo" pitchFamily="34" charset="-120"/>
+              </a:rPr>
+              <a:t>PAGE</a:t>
+            </a:r>
+            <a:endParaRPr lang="en-US" sz="2933" dirty="0"/>
+          </a:p>
+        </p:txBody>
+      </p:sp>
+      <p:sp>
+        <p:nvSpPr>
+          <p:cNvPr id="11" name="Text 9"/>
+          <p:cNvSpPr/>
+          <p:nvPr/>
+        </p:nvSpPr>
+        <p:spPr>
+          <a:xfrm>
+            <a:off x="2166793" y="3104952"/>
+            <a:ext cx="2624957" cy="1031081"/>
+          </a:xfrm>
+          <a:prstGeom prst="rect">
+            <a:avLst/>
+          </a:prstGeom>
+          <a:noFill/>
+          <a:ln/>
+        </p:spPr>
+        <p:txBody>
+          <a:bodyPr wrap="square" lIns="0" tIns="0" rIns="0" bIns="0" rtlCol="0" anchor="t"/>
+          <a:lstStyle/>
+          <a:p>
+            <a:pPr algn="l" indent="0" marL="0">
+              <a:lnSpc>
+                <a:spcPts val="2706"/>
+              </a:lnSpc>
+              <a:buNone/>
+            </a:pPr>
+            <a:r>
+              <a:rPr lang="en-US" sz="1866" dirty="0">
+                <a:solidFill>
+                  <a:srgbClr val="FFFFFF"/>
+                </a:solidFill>
+                <a:latin typeface="Arimo" pitchFamily="34" charset="0"/>
+                <a:ea typeface="Arimo" pitchFamily="34" charset="-122"/>
+                <a:cs typeface="Arimo" pitchFamily="34" charset="-120"/>
+              </a:rPr>
+              <a:t>Something is breaking now and only a person can stop it.</a:t>
+            </a:r>
+            <a:endParaRPr lang="en-US" sz="1866" dirty="0"/>
+          </a:p>
+        </p:txBody>
+      </p:sp>
+      <p:sp>
+        <p:nvSpPr>
+          <p:cNvPr id="12" name="Shape 10"/>
+          <p:cNvSpPr/>
+          <p:nvPr/>
+        </p:nvSpPr>
+        <p:spPr>
+          <a:xfrm>
+            <a:off x="2166793" y="4325541"/>
+            <a:ext cx="2573488" cy="0"/>
+          </a:xfrm>
+          <a:prstGeom prst="line">
+            <a:avLst/>
+          </a:prstGeom>
+          <a:noFill/>
+          <a:ln w="25397">
+            <a:solidFill>
+              <a:srgbClr val="FFFFFF"/>
+            </a:solidFill>
+            <a:prstDash val="solid"/>
+          </a:ln>
+        </p:spPr>
+      </p:sp>
+      <p:sp>
+        <p:nvSpPr>
+          <p:cNvPr id="13" name="Text 11"/>
+          <p:cNvSpPr/>
+          <p:nvPr/>
+        </p:nvSpPr>
+        <p:spPr>
+          <a:xfrm>
+            <a:off x="2166793" y="4507508"/>
+            <a:ext cx="2624957" cy="1031081"/>
+          </a:xfrm>
+          <a:prstGeom prst="rect">
+            <a:avLst/>
+          </a:prstGeom>
+          <a:noFill/>
+          <a:ln/>
+        </p:spPr>
+        <p:txBody>
+          <a:bodyPr wrap="square" lIns="0" tIns="0" rIns="0" bIns="0" rtlCol="0" anchor="t"/>
+          <a:lstStyle/>
+          <a:p>
+            <a:pPr algn="l" indent="0" marL="0">
+              <a:lnSpc>
+                <a:spcPts val="2706"/>
+              </a:lnSpc>
+              <a:buNone/>
+            </a:pPr>
+            <a:r>
+              <a:rPr lang="en-US" sz="1866" dirty="0">
+                <a:solidFill>
+                  <a:srgbClr val="FFFFFF"/>
+                </a:solidFill>
+                <a:latin typeface="Arimo" pitchFamily="34" charset="0"/>
+                <a:ea typeface="Arimo" pitchFamily="34" charset="-122"/>
+                <a:cs typeface="Arimo" pitchFamily="34" charset="-120"/>
+              </a:rPr>
+              <a:t>A page that could have waited teaches people to wait.</a:t>
+            </a:r>
+            <a:endParaRPr lang="en-US" sz="1866" dirty="0"/>
+          </a:p>
+        </p:txBody>
+      </p:sp>
+      <p:sp>
+        <p:nvSpPr>
+          <p:cNvPr id="14" name="Text 12"/>
+          <p:cNvSpPr/>
+          <p:nvPr/>
+        </p:nvSpPr>
+        <p:spPr>
+          <a:xfrm>
+            <a:off x="5078730" y="2292350"/>
+            <a:ext cx="50787" cy="3423047"/>
+          </a:xfrm>
+          <a:prstGeom prst="rect">
+            <a:avLst/>
+          </a:prstGeom>
+          <a:solidFill>
+            <a:srgbClr val="0A0A0A"/>
+          </a:solidFill>
+          <a:ln/>
+        </p:spPr>
+        <p:txBody>
+          <a:bodyPr wrap="square" rtlCol="0" anchor="ctr"/>
+          <a:lstStyle/>
+          <a:p>
+            <a:pPr indent="0" marL="0">
+              <a:buNone/>
+            </a:pPr>
+            <a:endParaRPr lang="en-US" dirty="0"/>
+          </a:p>
+        </p:txBody>
+      </p:sp>
+      <p:sp>
+        <p:nvSpPr>
+          <p:cNvPr id="15" name="Shape 13"/>
+          <p:cNvSpPr/>
+          <p:nvPr/>
+        </p:nvSpPr>
+        <p:spPr>
+          <a:xfrm>
+            <a:off x="5467967" y="2916634"/>
+            <a:ext cx="2573488" cy="0"/>
+          </a:xfrm>
+          <a:prstGeom prst="line">
+            <a:avLst/>
+          </a:prstGeom>
+          <a:noFill/>
+          <a:ln w="38095">
+            <a:solidFill>
+              <a:srgbClr val="0A0A0A"/>
+            </a:solidFill>
+            <a:prstDash val="solid"/>
+          </a:ln>
+        </p:spPr>
+      </p:sp>
+      <p:sp>
+        <p:nvSpPr>
+          <p:cNvPr id="16" name="Text 14"/>
+          <p:cNvSpPr/>
+          <p:nvPr/>
+        </p:nvSpPr>
+        <p:spPr>
+          <a:xfrm>
+            <a:off x="5467967" y="2362200"/>
+            <a:ext cx="1418513" cy="465534"/>
+          </a:xfrm>
+          <a:prstGeom prst="rect">
+            <a:avLst/>
+          </a:prstGeom>
+          <a:noFill/>
+          <a:ln/>
+        </p:spPr>
+        <p:txBody>
+          <a:bodyPr wrap="square" lIns="0" tIns="0" rIns="0" bIns="0" rtlCol="0" anchor="t"/>
+          <a:lstStyle/>
+          <a:p>
+            <a:pPr algn="l" indent="0" marL="0">
+              <a:lnSpc>
+                <a:spcPts val="3666"/>
+              </a:lnSpc>
+              <a:buNone/>
+            </a:pPr>
+            <a:r>
+              <a:rPr lang="en-US" sz="2933" b="1" dirty="0">
+                <a:solidFill>
+                  <a:srgbClr val="0A0A0A"/>
+                </a:solidFill>
+                <a:latin typeface="Arimo" pitchFamily="34" charset="0"/>
+                <a:ea typeface="Arimo" pitchFamily="34" charset="-122"/>
+                <a:cs typeface="Arimo" pitchFamily="34" charset="-120"/>
+              </a:rPr>
+              <a:t>TICKET</a:t>
+            </a:r>
+            <a:endParaRPr lang="en-US" sz="2933" dirty="0"/>
+          </a:p>
+        </p:txBody>
+      </p:sp>
+      <p:sp>
+        <p:nvSpPr>
+          <p:cNvPr id="17" name="Text 15"/>
+          <p:cNvSpPr/>
+          <p:nvPr/>
+        </p:nvSpPr>
+        <p:spPr>
+          <a:xfrm>
+            <a:off x="5467967" y="3104952"/>
+            <a:ext cx="2624957" cy="1031081"/>
+          </a:xfrm>
+          <a:prstGeom prst="rect">
+            <a:avLst/>
+          </a:prstGeom>
+          <a:noFill/>
+          <a:ln/>
+        </p:spPr>
+        <p:txBody>
+          <a:bodyPr wrap="square" lIns="0" tIns="0" rIns="0" bIns="0" rtlCol="0" anchor="t"/>
+          <a:lstStyle/>
+          <a:p>
+            <a:pPr algn="l" indent="0" marL="0">
+              <a:lnSpc>
+                <a:spcPts val="2706"/>
+              </a:lnSpc>
+              <a:buNone/>
+            </a:pPr>
+            <a:r>
+              <a:rPr lang="en-US" sz="1866" dirty="0">
+                <a:solidFill>
+                  <a:srgbClr val="0A0A0A"/>
+                </a:solidFill>
+                <a:latin typeface="Arimo" pitchFamily="34" charset="0"/>
+                <a:ea typeface="Arimo" pitchFamily="34" charset="-122"/>
+                <a:cs typeface="Arimo" pitchFamily="34" charset="-120"/>
+              </a:rPr>
+              <a:t>Real work that survives until the next working day.</a:t>
+            </a:r>
+            <a:endParaRPr lang="en-US" sz="1866" dirty="0"/>
+          </a:p>
+        </p:txBody>
+      </p:sp>
+      <p:sp>
+        <p:nvSpPr>
+          <p:cNvPr id="18" name="Shape 16"/>
+          <p:cNvSpPr/>
+          <p:nvPr/>
+        </p:nvSpPr>
+        <p:spPr>
+          <a:xfrm>
+            <a:off x="5467967" y="4325541"/>
+            <a:ext cx="2573488" cy="0"/>
+          </a:xfrm>
+          <a:prstGeom prst="line">
+            <a:avLst/>
+          </a:prstGeom>
+          <a:noFill/>
+          <a:ln w="25397">
+            <a:solidFill>
+              <a:srgbClr val="0A0A0A"/>
+            </a:solidFill>
+            <a:prstDash val="solid"/>
+          </a:ln>
+        </p:spPr>
+      </p:sp>
+      <p:sp>
+        <p:nvSpPr>
+          <p:cNvPr id="19" name="Text 17"/>
+          <p:cNvSpPr/>
+          <p:nvPr/>
+        </p:nvSpPr>
+        <p:spPr>
+          <a:xfrm>
+            <a:off x="5467967" y="4507508"/>
+            <a:ext cx="2624957" cy="1031081"/>
+          </a:xfrm>
+          <a:prstGeom prst="rect">
+            <a:avLst/>
+          </a:prstGeom>
+          <a:noFill/>
+          <a:ln/>
+        </p:spPr>
+        <p:txBody>
+          <a:bodyPr wrap="square" lIns="0" tIns="0" rIns="0" bIns="0" rtlCol="0" anchor="t"/>
+          <a:lstStyle/>
+          <a:p>
+            <a:pPr algn="l" indent="0" marL="0">
+              <a:lnSpc>
+                <a:spcPts val="2706"/>
+              </a:lnSpc>
+              <a:buNone/>
+            </a:pPr>
+            <a:r>
+              <a:rPr lang="en-US" sz="1866" dirty="0">
+                <a:solidFill>
+                  <a:srgbClr val="0A0A0A"/>
+                </a:solidFill>
+                <a:latin typeface="Arimo" pitchFamily="34" charset="0"/>
+                <a:ea typeface="Arimo" pitchFamily="34" charset="-122"/>
+                <a:cs typeface="Arimo" pitchFamily="34" charset="-120"/>
+              </a:rPr>
+              <a:t>Something urgent filed here is read after the outage.</a:t>
+            </a:r>
+            <a:endParaRPr lang="en-US" sz="1866" dirty="0"/>
+          </a:p>
+        </p:txBody>
+      </p:sp>
+      <p:sp>
+        <p:nvSpPr>
+          <p:cNvPr id="20" name="Text 18"/>
+          <p:cNvSpPr/>
+          <p:nvPr/>
+        </p:nvSpPr>
+        <p:spPr>
+          <a:xfrm>
+            <a:off x="8379905" y="2292350"/>
+            <a:ext cx="50787" cy="3423047"/>
+          </a:xfrm>
+          <a:prstGeom prst="rect">
+            <a:avLst/>
+          </a:prstGeom>
+          <a:solidFill>
+            <a:srgbClr val="0A0A0A"/>
+          </a:solidFill>
+          <a:ln/>
+        </p:spPr>
+        <p:txBody>
+          <a:bodyPr wrap="square" rtlCol="0" anchor="ctr"/>
+          <a:lstStyle/>
+          <a:p>
+            <a:pPr indent="0" marL="0">
+              <a:buNone/>
+            </a:pPr>
+            <a:endParaRPr lang="en-US" dirty="0"/>
+          </a:p>
+        </p:txBody>
+      </p:sp>
+      <p:sp>
+        <p:nvSpPr>
+          <p:cNvPr id="21" name="Shape 19"/>
+          <p:cNvSpPr/>
+          <p:nvPr/>
+        </p:nvSpPr>
+        <p:spPr>
+          <a:xfrm>
+            <a:off x="8769142" y="2916634"/>
+            <a:ext cx="2573488" cy="0"/>
+          </a:xfrm>
+          <a:prstGeom prst="line">
+            <a:avLst/>
+          </a:prstGeom>
+          <a:noFill/>
+          <a:ln w="38095">
+            <a:solidFill>
+              <a:srgbClr val="0A0A0A"/>
+            </a:solidFill>
+            <a:prstDash val="solid"/>
+          </a:ln>
+        </p:spPr>
+      </p:sp>
+      <p:sp>
+        <p:nvSpPr>
+          <p:cNvPr id="22" name="Text 20"/>
+          <p:cNvSpPr/>
+          <p:nvPr/>
+        </p:nvSpPr>
+        <p:spPr>
+          <a:xfrm>
+            <a:off x="8769142" y="2362200"/>
+            <a:ext cx="2529041" cy="465534"/>
+          </a:xfrm>
+          <a:prstGeom prst="rect">
+            <a:avLst/>
+          </a:prstGeom>
+          <a:noFill/>
+          <a:ln/>
+        </p:spPr>
+        <p:txBody>
+          <a:bodyPr wrap="square" lIns="0" tIns="0" rIns="0" bIns="0" rtlCol="0" anchor="t"/>
+          <a:lstStyle/>
+          <a:p>
+            <a:pPr algn="l" indent="0" marL="0">
+              <a:lnSpc>
+                <a:spcPts val="3666"/>
+              </a:lnSpc>
+              <a:buNone/>
+            </a:pPr>
+            <a:r>
+              <a:rPr lang="en-US" sz="2933" b="1" dirty="0">
+                <a:solidFill>
+                  <a:srgbClr val="0A0A0A"/>
+                </a:solidFill>
+                <a:latin typeface="Arimo" pitchFamily="34" charset="0"/>
+                <a:ea typeface="Arimo" pitchFamily="34" charset="-122"/>
+                <a:cs typeface="Arimo" pitchFamily="34" charset="-120"/>
+              </a:rPr>
+              <a:t>DASHBOARD</a:t>
+            </a:r>
+            <a:endParaRPr lang="en-US" sz="2933" dirty="0"/>
+          </a:p>
+        </p:txBody>
+      </p:sp>
+      <p:sp>
+        <p:nvSpPr>
+          <p:cNvPr id="23" name="Text 21"/>
+          <p:cNvSpPr/>
+          <p:nvPr/>
+        </p:nvSpPr>
+        <p:spPr>
+          <a:xfrm>
+            <a:off x="8769142" y="3104952"/>
+            <a:ext cx="2624957" cy="1031081"/>
+          </a:xfrm>
+          <a:prstGeom prst="rect">
+            <a:avLst/>
+          </a:prstGeom>
+          <a:noFill/>
+          <a:ln/>
+        </p:spPr>
+        <p:txBody>
+          <a:bodyPr wrap="square" lIns="0" tIns="0" rIns="0" bIns="0" rtlCol="0" anchor="t"/>
+          <a:lstStyle/>
+          <a:p>
+            <a:pPr algn="l" indent="0" marL="0">
+              <a:lnSpc>
+                <a:spcPts val="2706"/>
+              </a:lnSpc>
+              <a:buNone/>
+            </a:pPr>
+            <a:r>
+              <a:rPr lang="en-US" sz="1866" dirty="0">
+                <a:solidFill>
+                  <a:srgbClr val="0A0A0A"/>
+                </a:solidFill>
+                <a:latin typeface="Arimo" pitchFamily="34" charset="0"/>
+                <a:ea typeface="Arimo" pitchFamily="34" charset="-122"/>
+                <a:cs typeface="Arimo" pitchFamily="34" charset="-120"/>
+              </a:rPr>
+              <a:t>Context you read when you are already investigating.</a:t>
+            </a:r>
+            <a:endParaRPr lang="en-US" sz="1866" dirty="0"/>
+          </a:p>
+        </p:txBody>
+      </p:sp>
+      <p:sp>
+        <p:nvSpPr>
+          <p:cNvPr id="24" name="Shape 22"/>
+          <p:cNvSpPr/>
+          <p:nvPr/>
+        </p:nvSpPr>
+        <p:spPr>
+          <a:xfrm>
+            <a:off x="8769142" y="4325541"/>
+            <a:ext cx="2573488" cy="0"/>
+          </a:xfrm>
+          <a:prstGeom prst="line">
+            <a:avLst/>
+          </a:prstGeom>
+          <a:noFill/>
+          <a:ln w="25397">
+            <a:solidFill>
+              <a:srgbClr val="0A0A0A"/>
+            </a:solidFill>
+            <a:prstDash val="solid"/>
+          </a:ln>
+        </p:spPr>
+      </p:sp>
+      <p:sp>
+        <p:nvSpPr>
+          <p:cNvPr id="25" name="Text 23"/>
+          <p:cNvSpPr/>
+          <p:nvPr/>
+        </p:nvSpPr>
+        <p:spPr>
+          <a:xfrm>
+            <a:off x="8769142" y="4507508"/>
+            <a:ext cx="2624957" cy="1031081"/>
+          </a:xfrm>
+          <a:prstGeom prst="rect">
+            <a:avLst/>
+          </a:prstGeom>
+          <a:noFill/>
+          <a:ln/>
+        </p:spPr>
+        <p:txBody>
+          <a:bodyPr wrap="square" lIns="0" tIns="0" rIns="0" bIns="0" rtlCol="0" anchor="t"/>
+          <a:lstStyle/>
+          <a:p>
+            <a:pPr algn="l" indent="0" marL="0">
+              <a:lnSpc>
+                <a:spcPts val="2706"/>
+              </a:lnSpc>
+              <a:buNone/>
+            </a:pPr>
+            <a:r>
+              <a:rPr lang="en-US" sz="1866" dirty="0">
+                <a:solidFill>
+                  <a:srgbClr val="0A0A0A"/>
+                </a:solidFill>
+                <a:latin typeface="Arimo" pitchFamily="34" charset="0"/>
+                <a:ea typeface="Arimo" pitchFamily="34" charset="-122"/>
+                <a:cs typeface="Arimo" pitchFamily="34" charset="-120"/>
+              </a:rPr>
+              <a:t>A dashboard notifies nobody. At 3am it is a dark room.</a:t>
+            </a:r>
+            <a:endParaRPr lang="en-US" sz="1866" dirty="0"/>
+          </a:p>
+        </p:txBody>
+      </p:sp>
+      <p:sp>
+        <p:nvSpPr>
+          <p:cNvPr id="26" name="Text 24"/>
+          <p:cNvSpPr/>
+          <p:nvPr/>
+        </p:nvSpPr>
+        <p:spPr>
+          <a:xfrm>
+            <a:off x="643174" y="5884664"/>
+            <a:ext cx="10902605" cy="25400"/>
+          </a:xfrm>
+          <a:prstGeom prst="rect">
+            <a:avLst/>
+          </a:prstGeom>
+          <a:solidFill>
+            <a:srgbClr val="0A0A0A"/>
+          </a:solidFill>
+          <a:ln/>
+        </p:spPr>
+        <p:txBody>
+          <a:bodyPr wrap="square" rtlCol="0" anchor="ctr"/>
+          <a:lstStyle/>
+          <a:p>
+            <a:pPr indent="0" marL="0">
+              <a:buNone/>
+            </a:pPr>
+            <a:endParaRPr lang="en-US" dirty="0"/>
+          </a:p>
+        </p:txBody>
+      </p:sp>
+      <p:sp>
+        <p:nvSpPr>
+          <p:cNvPr id="27" name="Text 25"/>
+          <p:cNvSpPr/>
+          <p:nvPr/>
+        </p:nvSpPr>
+        <p:spPr>
+          <a:xfrm>
+            <a:off x="643174" y="5910064"/>
+            <a:ext cx="11120657" cy="304602"/>
+          </a:xfrm>
+          <a:prstGeom prst="rect">
+            <a:avLst/>
+          </a:prstGeom>
+          <a:noFill/>
+          <a:ln/>
+        </p:spPr>
+        <p:txBody>
+          <a:bodyPr wrap="square" lIns="0" tIns="67725" rIns="0" bIns="0" rtlCol="0" anchor="t"/>
+          <a:lstStyle/>
+          <a:p>
+            <a:pPr algn="l" indent="0" marL="0">
+              <a:lnSpc>
+                <a:spcPts val="1866"/>
+              </a:lnSpc>
+              <a:buNone/>
+            </a:pPr>
+            <a:r>
+              <a:rPr lang="en-US" sz="1333" dirty="0">
+                <a:solidFill>
+                  <a:srgbClr val="767676"/>
+                </a:solidFill>
+                <a:latin typeface="Arimo" pitchFamily="34" charset="0"/>
+                <a:ea typeface="Arimo" pitchFamily="34" charset="-122"/>
+                <a:cs typeface="Arimo" pitchFamily="34" charset="-120"/>
+              </a:rPr>
+              <a:t>ALERT DESIGN · SHEET 02/05 · NO CHART, NO EXTERNAL DATA</a:t>
+            </a:r>
+            <a:endParaRPr lang="en-US" sz="1333" dirty="0"/>
+          </a:p>
+        </p:txBody>
+      </p:sp>
     </p:spTree>
   </p:cSld>
   <p:clrMapOvr>
@@ -1308,6 +2481,13 @@
 <file path=ppt/slides/slide3.xml><?xml version="1.0" encoding="utf-8"?>
 <p:sld xmlns:a="http://schemas.openxmlformats.org/drawingml/2006/main" xmlns:r="http://schemas.openxmlformats.org/officeDocument/2006/relationships" xmlns:p="http://schemas.openxmlformats.org/presentationml/2006/main">
   <p:cSld name="Slide 3">
+    <p:bg>
+      <p:bgPr>
+        <a:solidFill>
+          <a:srgbClr val="FFFFFF"/>
+        </a:solidFill>
+      </p:bgPr>
+    </p:bg>
     <p:spTree>
       <p:nvGrpSpPr>
         <p:cNvPr id="1" name=""/>
@@ -1322,30 +2502,1077 @@
           <a:chExt cx="0" cy="0"/>
         </a:xfrm>
       </p:grpSpPr>
+      <p:sp>
+        <p:nvSpPr>
+          <p:cNvPr id="2" name="Text 0"/>
+          <p:cNvSpPr/>
+          <p:nvPr/>
+        </p:nvSpPr>
+        <p:spPr>
+          <a:xfrm>
+            <a:off x="643174" y="508000"/>
+            <a:ext cx="11120657" cy="236934"/>
+          </a:xfrm>
+          <a:prstGeom prst="rect">
+            <a:avLst/>
+          </a:prstGeom>
+          <a:noFill/>
+          <a:ln/>
+        </p:spPr>
+        <p:txBody>
+          <a:bodyPr wrap="square" lIns="0" tIns="0" rIns="0" bIns="0" rtlCol="0" anchor="t"/>
+          <a:lstStyle/>
+          <a:p>
+            <a:pPr algn="l" indent="0" marL="0">
+              <a:lnSpc>
+                <a:spcPts val="1866"/>
+              </a:lnSpc>
+              <a:spcAft>
+                <a:spcPts val="800"/>
+              </a:spcAft>
+              <a:buNone/>
+            </a:pPr>
+            <a:r>
+              <a:rPr lang="en-US" sz="1333" b="1" dirty="0">
+                <a:solidFill>
+                  <a:srgbClr val="3D3D3D"/>
+                </a:solidFill>
+                <a:latin typeface="Arimo" pitchFamily="34" charset="0"/>
+                <a:ea typeface="Arimo" pitchFamily="34" charset="-122"/>
+                <a:cs typeface="Arimo" pitchFamily="34" charset="-120"/>
+              </a:rPr>
+              <a:t>03 · THE TEST</a:t>
+            </a:r>
+            <a:endParaRPr lang="en-US" sz="1333" dirty="0"/>
+          </a:p>
+        </p:txBody>
+      </p:sp>
+      <p:sp>
+        <p:nvSpPr>
+          <p:cNvPr id="3" name="Text 1"/>
+          <p:cNvSpPr/>
+          <p:nvPr/>
+        </p:nvSpPr>
+        <p:spPr>
+          <a:xfrm>
+            <a:off x="643174" y="846534"/>
+            <a:ext cx="11120657" cy="487561"/>
+          </a:xfrm>
+          <a:prstGeom prst="rect">
+            <a:avLst/>
+          </a:prstGeom>
+          <a:noFill/>
+          <a:ln/>
+        </p:spPr>
+        <p:txBody>
+          <a:bodyPr wrap="square" lIns="0" tIns="0" rIns="0" bIns="0" rtlCol="0" anchor="t"/>
+          <a:lstStyle/>
+          <a:p>
+            <a:pPr algn="l" indent="0" marL="0">
+              <a:lnSpc>
+                <a:spcPts val="3840"/>
+              </a:lnSpc>
+              <a:spcAft>
+                <a:spcPts val="1067"/>
+              </a:spcAft>
+              <a:buNone/>
+            </a:pPr>
+            <a:r>
+              <a:rPr lang="en-US" sz="3200" b="1" dirty="0">
+                <a:solidFill>
+                  <a:srgbClr val="0A0A0A"/>
+                </a:solidFill>
+                <a:latin typeface="Arimo" pitchFamily="34" charset="0"/>
+                <a:ea typeface="Arimo" pitchFamily="34" charset="-122"/>
+                <a:cs typeface="Arimo" pitchFamily="34" charset="-120"/>
+              </a:rPr>
+              <a:t>The test an alert must pass to earn a page</a:t>
+            </a:r>
+            <a:endParaRPr lang="en-US" sz="3200" dirty="0"/>
+          </a:p>
+        </p:txBody>
+      </p:sp>
+      <p:sp>
+        <p:nvSpPr>
+          <p:cNvPr id="4" name="Text 2"/>
+          <p:cNvSpPr/>
+          <p:nvPr/>
+        </p:nvSpPr>
+        <p:spPr>
+          <a:xfrm>
+            <a:off x="643174" y="1469430"/>
+            <a:ext cx="11120657" cy="331986"/>
+          </a:xfrm>
+          <a:prstGeom prst="rect">
+            <a:avLst/>
+          </a:prstGeom>
+          <a:noFill/>
+          <a:ln/>
+        </p:spPr>
+        <p:txBody>
+          <a:bodyPr wrap="square" lIns="0" tIns="0" rIns="0" bIns="0" rtlCol="0" anchor="t"/>
+          <a:lstStyle/>
+          <a:p>
+            <a:pPr algn="l" indent="0" marL="0">
+              <a:lnSpc>
+                <a:spcPts val="2613"/>
+              </a:lnSpc>
+              <a:spcAft>
+                <a:spcPts val="1600"/>
+              </a:spcAft>
+              <a:buNone/>
+            </a:pPr>
+            <a:r>
+              <a:rPr lang="en-US" sz="1866" dirty="0">
+                <a:solidFill>
+                  <a:srgbClr val="3D3D3D"/>
+                </a:solidFill>
+                <a:latin typeface="Arimo" pitchFamily="34" charset="0"/>
+                <a:ea typeface="Arimo" pitchFamily="34" charset="-122"/>
+                <a:cs typeface="Arimo" pitchFamily="34" charset="-120"/>
+              </a:rPr>
+              <a:t>Three questions. A no to any one of them means this is not a page.</a:t>
+            </a:r>
+            <a:endParaRPr lang="en-US" sz="1866" dirty="0"/>
+          </a:p>
+        </p:txBody>
+      </p:sp>
+      <p:sp>
+        <p:nvSpPr>
+          <p:cNvPr id="5" name="Text 3"/>
+          <p:cNvSpPr/>
+          <p:nvPr/>
+        </p:nvSpPr>
+        <p:spPr>
+          <a:xfrm>
+            <a:off x="643174" y="2004616"/>
+            <a:ext cx="10902605" cy="50800"/>
+          </a:xfrm>
+          <a:prstGeom prst="rect">
+            <a:avLst/>
+          </a:prstGeom>
+          <a:solidFill>
+            <a:srgbClr val="0A0A0A"/>
+          </a:solidFill>
+          <a:ln/>
+        </p:spPr>
+        <p:txBody>
+          <a:bodyPr wrap="square" rtlCol="0" anchor="ctr"/>
+          <a:lstStyle/>
+          <a:p>
+            <a:pPr indent="0" marL="0">
+              <a:buNone/>
+            </a:pPr>
+            <a:endParaRPr lang="en-US" dirty="0"/>
+          </a:p>
+        </p:txBody>
+      </p:sp>
+      <p:sp>
+        <p:nvSpPr>
+          <p:cNvPr id="6" name="Text 4"/>
+          <p:cNvSpPr/>
+          <p:nvPr/>
+        </p:nvSpPr>
+        <p:spPr>
+          <a:xfrm>
+            <a:off x="871716" y="2520950"/>
+            <a:ext cx="372374" cy="372467"/>
+          </a:xfrm>
+          <a:prstGeom prst="rect">
+            <a:avLst/>
+          </a:prstGeom>
+          <a:solidFill>
+            <a:srgbClr val="0A0A0A"/>
+          </a:solidFill>
+          <a:ln/>
+        </p:spPr>
+        <p:txBody>
+          <a:bodyPr wrap="square" rtlCol="0" anchor="ctr"/>
+          <a:lstStyle/>
+          <a:p>
+            <a:pPr indent="0" marL="0">
+              <a:buNone/>
+            </a:pPr>
+            <a:endParaRPr lang="en-US" dirty="0"/>
+          </a:p>
+        </p:txBody>
+      </p:sp>
+      <p:sp>
+        <p:nvSpPr>
+          <p:cNvPr id="7" name="Text 5"/>
+          <p:cNvSpPr/>
+          <p:nvPr/>
+        </p:nvSpPr>
+        <p:spPr>
+          <a:xfrm>
+            <a:off x="939565" y="2565003"/>
+            <a:ext cx="241410" cy="284361"/>
+          </a:xfrm>
+          <a:prstGeom prst="rect">
+            <a:avLst/>
+          </a:prstGeom>
+          <a:noFill/>
+          <a:ln/>
+        </p:spPr>
+        <p:txBody>
+          <a:bodyPr wrap="square" lIns="0" tIns="0" rIns="0" bIns="0" rtlCol="0" anchor="t"/>
+          <a:lstStyle/>
+          <a:p>
+            <a:pPr algn="l" indent="0" marL="0">
+              <a:lnSpc>
+                <a:spcPts val="2240"/>
+              </a:lnSpc>
+              <a:buNone/>
+            </a:pPr>
+            <a:r>
+              <a:rPr lang="en-US" sz="1600" b="1" dirty="0">
+                <a:solidFill>
+                  <a:srgbClr val="FFFFFF"/>
+                </a:solidFill>
+                <a:latin typeface="Arimo" pitchFamily="34" charset="0"/>
+                <a:ea typeface="Arimo" pitchFamily="34" charset="-122"/>
+                <a:cs typeface="Arimo" pitchFamily="34" charset="-120"/>
+              </a:rPr>
+              <a:t>01</a:t>
+            </a:r>
+            <a:endParaRPr lang="en-US" sz="1600" dirty="0"/>
+          </a:p>
+        </p:txBody>
+      </p:sp>
+      <p:sp>
+        <p:nvSpPr>
+          <p:cNvPr id="8" name="Text 6"/>
+          <p:cNvSpPr/>
+          <p:nvPr/>
+        </p:nvSpPr>
+        <p:spPr>
+          <a:xfrm>
+            <a:off x="871716" y="3062684"/>
+            <a:ext cx="3056582" cy="352028"/>
+          </a:xfrm>
+          <a:prstGeom prst="rect">
+            <a:avLst/>
+          </a:prstGeom>
+          <a:noFill/>
+          <a:ln/>
+        </p:spPr>
+        <p:txBody>
+          <a:bodyPr wrap="square" lIns="0" tIns="0" rIns="0" bIns="0" rtlCol="0" anchor="t"/>
+          <a:lstStyle/>
+          <a:p>
+            <a:pPr algn="l" indent="0" marL="0">
+              <a:lnSpc>
+                <a:spcPts val="2773"/>
+              </a:lnSpc>
+              <a:spcBef>
+                <a:spcPts val="1333"/>
+              </a:spcBef>
+              <a:buNone/>
+            </a:pPr>
+            <a:r>
+              <a:rPr lang="en-US" sz="2133" b="1" dirty="0">
+                <a:solidFill>
+                  <a:srgbClr val="0A0A0A"/>
+                </a:solidFill>
+                <a:latin typeface="Arimo" pitchFamily="34" charset="0"/>
+                <a:ea typeface="Arimo" pitchFamily="34" charset="-122"/>
+                <a:cs typeface="Arimo" pitchFamily="34" charset="-120"/>
+              </a:rPr>
+              <a:t>URGENT</a:t>
+            </a:r>
+            <a:endParaRPr lang="en-US" sz="2133" dirty="0"/>
+          </a:p>
+        </p:txBody>
+      </p:sp>
+      <p:sp>
+        <p:nvSpPr>
+          <p:cNvPr id="9" name="Text 7"/>
+          <p:cNvSpPr/>
+          <p:nvPr/>
+        </p:nvSpPr>
+        <p:spPr>
+          <a:xfrm>
+            <a:off x="871716" y="3550047"/>
+            <a:ext cx="3056582" cy="687388"/>
+          </a:xfrm>
+          <a:prstGeom prst="rect">
+            <a:avLst/>
+          </a:prstGeom>
+          <a:noFill/>
+          <a:ln/>
+        </p:spPr>
+        <p:txBody>
+          <a:bodyPr wrap="square" lIns="0" tIns="0" rIns="0" bIns="0" rtlCol="0" anchor="t"/>
+          <a:lstStyle/>
+          <a:p>
+            <a:pPr algn="l" indent="0" marL="0">
+              <a:lnSpc>
+                <a:spcPts val="2706"/>
+              </a:lnSpc>
+              <a:spcBef>
+                <a:spcPts val="1067"/>
+              </a:spcBef>
+              <a:buNone/>
+            </a:pPr>
+            <a:r>
+              <a:rPr lang="en-US" sz="1866" dirty="0">
+                <a:solidFill>
+                  <a:srgbClr val="0A0A0A"/>
+                </a:solidFill>
+                <a:latin typeface="Arimo" pitchFamily="34" charset="0"/>
+                <a:ea typeface="Arimo" pitchFamily="34" charset="-122"/>
+                <a:cs typeface="Arimo" pitchFamily="34" charset="-120"/>
+              </a:rPr>
+              <a:t>Does waiting until morning make it worse?</a:t>
+            </a:r>
+            <a:endParaRPr lang="en-US" sz="1866" dirty="0"/>
+          </a:p>
+        </p:txBody>
+      </p:sp>
+      <p:sp>
+        <p:nvSpPr>
+          <p:cNvPr id="10" name="Text 8"/>
+          <p:cNvSpPr/>
+          <p:nvPr/>
+        </p:nvSpPr>
+        <p:spPr>
+          <a:xfrm>
+            <a:off x="668567" y="4242991"/>
+            <a:ext cx="3402947" cy="507603"/>
+          </a:xfrm>
+          <a:prstGeom prst="rect">
+            <a:avLst/>
+          </a:prstGeom>
+          <a:solidFill>
+            <a:srgbClr val="E6E6E6"/>
+          </a:solidFill>
+          <a:ln/>
+        </p:spPr>
+        <p:txBody>
+          <a:bodyPr wrap="square" rtlCol="0" anchor="ctr"/>
+          <a:lstStyle/>
+          <a:p>
+            <a:pPr indent="0" marL="0">
+              <a:buNone/>
+            </a:pPr>
+            <a:endParaRPr lang="en-US" dirty="0"/>
+          </a:p>
+        </p:txBody>
+      </p:sp>
+      <p:sp>
+        <p:nvSpPr>
+          <p:cNvPr id="11" name="Text 9"/>
+          <p:cNvSpPr/>
+          <p:nvPr/>
+        </p:nvSpPr>
+        <p:spPr>
+          <a:xfrm>
+            <a:off x="871716" y="4378325"/>
+            <a:ext cx="3056582" cy="236934"/>
+          </a:xfrm>
+          <a:prstGeom prst="rect">
+            <a:avLst/>
+          </a:prstGeom>
+          <a:noFill/>
+          <a:ln/>
+        </p:spPr>
+        <p:txBody>
+          <a:bodyPr wrap="square" lIns="0" tIns="0" rIns="0" bIns="0" rtlCol="0" anchor="t"/>
+          <a:lstStyle/>
+          <a:p>
+            <a:pPr algn="l" indent="0" marL="0">
+              <a:lnSpc>
+                <a:spcPts val="1866"/>
+              </a:lnSpc>
+              <a:buNone/>
+            </a:pPr>
+            <a:r>
+              <a:rPr lang="en-US" sz="1333" b="1" dirty="0">
+                <a:solidFill>
+                  <a:srgbClr val="3D3D3D"/>
+                </a:solidFill>
+                <a:latin typeface="Arimo" pitchFamily="34" charset="0"/>
+                <a:ea typeface="Arimo" pitchFamily="34" charset="-122"/>
+                <a:cs typeface="Arimo" pitchFamily="34" charset="-120"/>
+              </a:rPr>
+              <a:t>IF NO · SEND TO TICKET</a:t>
+            </a:r>
+            <a:endParaRPr lang="en-US" sz="1333" dirty="0"/>
+          </a:p>
+        </p:txBody>
+      </p:sp>
       <p:pic>
         <p:nvPicPr>
-          <p:cNvPr id="2" name="Image 0" descr="/tmp/slide-1787840609817-bsgwgmxlfew.png">    </p:cNvPr>
+          <p:cNvPr id="12" name="Image 0" descr="preencoded.png">    </p:cNvPr>
           <p:cNvPicPr>
             <a:picLocks noChangeAspect="1"/>
           </p:cNvPicPr>
           <p:nvPr/>
         </p:nvPicPr>
         <p:blipFill>
-          <a:blip r:embed="rId1"/>
+          <a:blip r:embed="rId1">
+            <a:extLst>
+              <a:ext uri="{96DAC541-7B7A-43D3-8B79-37D633B846F1}">
+                <asvg:svgBlip xmlns:asvg="http://schemas.microsoft.com/office/drawing/2016/SVG/main" r:embed="rId2"/>
+              </a:ext>
+            </a:extLst>
+          </a:blip>
           <a:stretch>
             <a:fillRect/>
           </a:stretch>
         </p:blipFill>
         <p:spPr>
           <a:xfrm>
-            <a:off x="0" y="0"/>
-            <a:ext cx="12188952" cy="6858000"/>
+            <a:off x="4096908" y="3449439"/>
+            <a:ext cx="270799" cy="169267"/>
           </a:xfrm>
           <a:prstGeom prst="rect">
             <a:avLst/>
           </a:prstGeom>
         </p:spPr>
       </p:pic>
+      <p:sp>
+        <p:nvSpPr>
+          <p:cNvPr id="13" name="Text 10"/>
+          <p:cNvSpPr/>
+          <p:nvPr/>
+        </p:nvSpPr>
+        <p:spPr>
+          <a:xfrm>
+            <a:off x="4596251" y="2520950"/>
+            <a:ext cx="372374" cy="372467"/>
+          </a:xfrm>
+          <a:prstGeom prst="rect">
+            <a:avLst/>
+          </a:prstGeom>
+          <a:solidFill>
+            <a:srgbClr val="0A0A0A"/>
+          </a:solidFill>
+          <a:ln/>
+        </p:spPr>
+        <p:txBody>
+          <a:bodyPr wrap="square" rtlCol="0" anchor="ctr"/>
+          <a:lstStyle/>
+          <a:p>
+            <a:pPr indent="0" marL="0">
+              <a:buNone/>
+            </a:pPr>
+            <a:endParaRPr lang="en-US" dirty="0"/>
+          </a:p>
+        </p:txBody>
+      </p:sp>
+      <p:sp>
+        <p:nvSpPr>
+          <p:cNvPr id="14" name="Text 11"/>
+          <p:cNvSpPr/>
+          <p:nvPr/>
+        </p:nvSpPr>
+        <p:spPr>
+          <a:xfrm>
+            <a:off x="4664099" y="2565003"/>
+            <a:ext cx="241410" cy="284361"/>
+          </a:xfrm>
+          <a:prstGeom prst="rect">
+            <a:avLst/>
+          </a:prstGeom>
+          <a:noFill/>
+          <a:ln/>
+        </p:spPr>
+        <p:txBody>
+          <a:bodyPr wrap="square" lIns="0" tIns="0" rIns="0" bIns="0" rtlCol="0" anchor="t"/>
+          <a:lstStyle/>
+          <a:p>
+            <a:pPr algn="l" indent="0" marL="0">
+              <a:lnSpc>
+                <a:spcPts val="2240"/>
+              </a:lnSpc>
+              <a:buNone/>
+            </a:pPr>
+            <a:r>
+              <a:rPr lang="en-US" sz="1600" b="1" dirty="0">
+                <a:solidFill>
+                  <a:srgbClr val="FFFFFF"/>
+                </a:solidFill>
+                <a:latin typeface="Arimo" pitchFamily="34" charset="0"/>
+                <a:ea typeface="Arimo" pitchFamily="34" charset="-122"/>
+                <a:cs typeface="Arimo" pitchFamily="34" charset="-120"/>
+              </a:rPr>
+              <a:t>02</a:t>
+            </a:r>
+            <a:endParaRPr lang="en-US" sz="1600" dirty="0"/>
+          </a:p>
+        </p:txBody>
+      </p:sp>
+      <p:sp>
+        <p:nvSpPr>
+          <p:cNvPr id="15" name="Text 12"/>
+          <p:cNvSpPr/>
+          <p:nvPr/>
+        </p:nvSpPr>
+        <p:spPr>
+          <a:xfrm>
+            <a:off x="4596251" y="3062684"/>
+            <a:ext cx="3056582" cy="352028"/>
+          </a:xfrm>
+          <a:prstGeom prst="rect">
+            <a:avLst/>
+          </a:prstGeom>
+          <a:noFill/>
+          <a:ln/>
+        </p:spPr>
+        <p:txBody>
+          <a:bodyPr wrap="square" lIns="0" tIns="0" rIns="0" bIns="0" rtlCol="0" anchor="t"/>
+          <a:lstStyle/>
+          <a:p>
+            <a:pPr algn="l" indent="0" marL="0">
+              <a:lnSpc>
+                <a:spcPts val="2773"/>
+              </a:lnSpc>
+              <a:spcBef>
+                <a:spcPts val="1333"/>
+              </a:spcBef>
+              <a:buNone/>
+            </a:pPr>
+            <a:r>
+              <a:rPr lang="en-US" sz="2133" b="1" dirty="0">
+                <a:solidFill>
+                  <a:srgbClr val="0A0A0A"/>
+                </a:solidFill>
+                <a:latin typeface="Arimo" pitchFamily="34" charset="0"/>
+                <a:ea typeface="Arimo" pitchFamily="34" charset="-122"/>
+                <a:cs typeface="Arimo" pitchFamily="34" charset="-120"/>
+              </a:rPr>
+              <a:t>ACTIONABLE</a:t>
+            </a:r>
+            <a:endParaRPr lang="en-US" sz="2133" dirty="0"/>
+          </a:p>
+        </p:txBody>
+      </p:sp>
+      <p:sp>
+        <p:nvSpPr>
+          <p:cNvPr id="16" name="Text 13"/>
+          <p:cNvSpPr/>
+          <p:nvPr/>
+        </p:nvSpPr>
+        <p:spPr>
+          <a:xfrm>
+            <a:off x="4596251" y="3550047"/>
+            <a:ext cx="3056582" cy="687388"/>
+          </a:xfrm>
+          <a:prstGeom prst="rect">
+            <a:avLst/>
+          </a:prstGeom>
+          <a:noFill/>
+          <a:ln/>
+        </p:spPr>
+        <p:txBody>
+          <a:bodyPr wrap="square" lIns="0" tIns="0" rIns="0" bIns="0" rtlCol="0" anchor="t"/>
+          <a:lstStyle/>
+          <a:p>
+            <a:pPr algn="l" indent="0" marL="0">
+              <a:lnSpc>
+                <a:spcPts val="2706"/>
+              </a:lnSpc>
+              <a:spcBef>
+                <a:spcPts val="1067"/>
+              </a:spcBef>
+              <a:buNone/>
+            </a:pPr>
+            <a:r>
+              <a:rPr lang="en-US" sz="1866" dirty="0">
+                <a:solidFill>
+                  <a:srgbClr val="0A0A0A"/>
+                </a:solidFill>
+                <a:latin typeface="Arimo" pitchFamily="34" charset="0"/>
+                <a:ea typeface="Arimo" pitchFamily="34" charset="-122"/>
+                <a:cs typeface="Arimo" pitchFamily="34" charset="-120"/>
+              </a:rPr>
+              <a:t>Is there a step someone can take right now?</a:t>
+            </a:r>
+            <a:endParaRPr lang="en-US" sz="1866" dirty="0"/>
+          </a:p>
+        </p:txBody>
+      </p:sp>
+      <p:sp>
+        <p:nvSpPr>
+          <p:cNvPr id="17" name="Text 14"/>
+          <p:cNvSpPr/>
+          <p:nvPr/>
+        </p:nvSpPr>
+        <p:spPr>
+          <a:xfrm>
+            <a:off x="4393101" y="4242991"/>
+            <a:ext cx="3402947" cy="507603"/>
+          </a:xfrm>
+          <a:prstGeom prst="rect">
+            <a:avLst/>
+          </a:prstGeom>
+          <a:solidFill>
+            <a:srgbClr val="E6E6E6"/>
+          </a:solidFill>
+          <a:ln/>
+        </p:spPr>
+        <p:txBody>
+          <a:bodyPr wrap="square" rtlCol="0" anchor="ctr"/>
+          <a:lstStyle/>
+          <a:p>
+            <a:pPr indent="0" marL="0">
+              <a:buNone/>
+            </a:pPr>
+            <a:endParaRPr lang="en-US" dirty="0"/>
+          </a:p>
+        </p:txBody>
+      </p:sp>
+      <p:sp>
+        <p:nvSpPr>
+          <p:cNvPr id="18" name="Text 15"/>
+          <p:cNvSpPr/>
+          <p:nvPr/>
+        </p:nvSpPr>
+        <p:spPr>
+          <a:xfrm>
+            <a:off x="4596251" y="4378325"/>
+            <a:ext cx="3056582" cy="236934"/>
+          </a:xfrm>
+          <a:prstGeom prst="rect">
+            <a:avLst/>
+          </a:prstGeom>
+          <a:noFill/>
+          <a:ln/>
+        </p:spPr>
+        <p:txBody>
+          <a:bodyPr wrap="square" lIns="0" tIns="0" rIns="0" bIns="0" rtlCol="0" anchor="t"/>
+          <a:lstStyle/>
+          <a:p>
+            <a:pPr algn="l" indent="0" marL="0">
+              <a:lnSpc>
+                <a:spcPts val="1866"/>
+              </a:lnSpc>
+              <a:buNone/>
+            </a:pPr>
+            <a:r>
+              <a:rPr lang="en-US" sz="1333" b="1" dirty="0">
+                <a:solidFill>
+                  <a:srgbClr val="3D3D3D"/>
+                </a:solidFill>
+                <a:latin typeface="Arimo" pitchFamily="34" charset="0"/>
+                <a:ea typeface="Arimo" pitchFamily="34" charset="-122"/>
+                <a:cs typeface="Arimo" pitchFamily="34" charset="-120"/>
+              </a:rPr>
+              <a:t>IF NO · DELETE OR FIX</a:t>
+            </a:r>
+            <a:endParaRPr lang="en-US" sz="1333" dirty="0"/>
+          </a:p>
+        </p:txBody>
+      </p:sp>
+      <p:pic>
+        <p:nvPicPr>
+          <p:cNvPr id="19" name="Image 1" descr="preencoded.png">    </p:cNvPr>
+          <p:cNvPicPr>
+            <a:picLocks noChangeAspect="1"/>
+          </p:cNvPicPr>
+          <p:nvPr/>
+        </p:nvPicPr>
+        <p:blipFill>
+          <a:blip r:embed="rId3">
+            <a:extLst>
+              <a:ext uri="{96DAC541-7B7A-43D3-8B79-37D633B846F1}">
+                <asvg:svgBlip xmlns:asvg="http://schemas.microsoft.com/office/drawing/2016/SVG/main" r:embed="rId4"/>
+              </a:ext>
+            </a:extLst>
+          </a:blip>
+          <a:stretch>
+            <a:fillRect/>
+          </a:stretch>
+        </p:blipFill>
+        <p:spPr>
+          <a:xfrm>
+            <a:off x="7821443" y="3449439"/>
+            <a:ext cx="270799" cy="169267"/>
+          </a:xfrm>
+          <a:prstGeom prst="rect">
+            <a:avLst/>
+          </a:prstGeom>
+        </p:spPr>
+      </p:pic>
+      <p:sp>
+        <p:nvSpPr>
+          <p:cNvPr id="20" name="Text 16"/>
+          <p:cNvSpPr/>
+          <p:nvPr/>
+        </p:nvSpPr>
+        <p:spPr>
+          <a:xfrm>
+            <a:off x="8320785" y="2520950"/>
+            <a:ext cx="372374" cy="372467"/>
+          </a:xfrm>
+          <a:prstGeom prst="rect">
+            <a:avLst/>
+          </a:prstGeom>
+          <a:solidFill>
+            <a:srgbClr val="0A0A0A"/>
+          </a:solidFill>
+          <a:ln/>
+        </p:spPr>
+        <p:txBody>
+          <a:bodyPr wrap="square" rtlCol="0" anchor="ctr"/>
+          <a:lstStyle/>
+          <a:p>
+            <a:pPr indent="0" marL="0">
+              <a:buNone/>
+            </a:pPr>
+            <a:endParaRPr lang="en-US" dirty="0"/>
+          </a:p>
+        </p:txBody>
+      </p:sp>
+      <p:sp>
+        <p:nvSpPr>
+          <p:cNvPr id="21" name="Text 17"/>
+          <p:cNvSpPr/>
+          <p:nvPr/>
+        </p:nvSpPr>
+        <p:spPr>
+          <a:xfrm>
+            <a:off x="8388634" y="2565003"/>
+            <a:ext cx="241410" cy="284361"/>
+          </a:xfrm>
+          <a:prstGeom prst="rect">
+            <a:avLst/>
+          </a:prstGeom>
+          <a:noFill/>
+          <a:ln/>
+        </p:spPr>
+        <p:txBody>
+          <a:bodyPr wrap="square" lIns="0" tIns="0" rIns="0" bIns="0" rtlCol="0" anchor="t"/>
+          <a:lstStyle/>
+          <a:p>
+            <a:pPr algn="l" indent="0" marL="0">
+              <a:lnSpc>
+                <a:spcPts val="2240"/>
+              </a:lnSpc>
+              <a:buNone/>
+            </a:pPr>
+            <a:r>
+              <a:rPr lang="en-US" sz="1600" b="1" dirty="0">
+                <a:solidFill>
+                  <a:srgbClr val="FFFFFF"/>
+                </a:solidFill>
+                <a:latin typeface="Arimo" pitchFamily="34" charset="0"/>
+                <a:ea typeface="Arimo" pitchFamily="34" charset="-122"/>
+                <a:cs typeface="Arimo" pitchFamily="34" charset="-120"/>
+              </a:rPr>
+              <a:t>03</a:t>
+            </a:r>
+            <a:endParaRPr lang="en-US" sz="1600" dirty="0"/>
+          </a:p>
+        </p:txBody>
+      </p:sp>
+      <p:sp>
+        <p:nvSpPr>
+          <p:cNvPr id="22" name="Text 18"/>
+          <p:cNvSpPr/>
+          <p:nvPr/>
+        </p:nvSpPr>
+        <p:spPr>
+          <a:xfrm>
+            <a:off x="8320785" y="3062684"/>
+            <a:ext cx="3056582" cy="352028"/>
+          </a:xfrm>
+          <a:prstGeom prst="rect">
+            <a:avLst/>
+          </a:prstGeom>
+          <a:noFill/>
+          <a:ln/>
+        </p:spPr>
+        <p:txBody>
+          <a:bodyPr wrap="square" lIns="0" tIns="0" rIns="0" bIns="0" rtlCol="0" anchor="t"/>
+          <a:lstStyle/>
+          <a:p>
+            <a:pPr algn="l" indent="0" marL="0">
+              <a:lnSpc>
+                <a:spcPts val="2773"/>
+              </a:lnSpc>
+              <a:spcBef>
+                <a:spcPts val="1333"/>
+              </a:spcBef>
+              <a:buNone/>
+            </a:pPr>
+            <a:r>
+              <a:rPr lang="en-US" sz="2133" b="1" dirty="0">
+                <a:solidFill>
+                  <a:srgbClr val="0A0A0A"/>
+                </a:solidFill>
+                <a:latin typeface="Arimo" pitchFamily="34" charset="0"/>
+                <a:ea typeface="Arimo" pitchFamily="34" charset="-122"/>
+                <a:cs typeface="Arimo" pitchFamily="34" charset="-120"/>
+              </a:rPr>
+              <a:t>HUMAN ONLY</a:t>
+            </a:r>
+            <a:endParaRPr lang="en-US" sz="2133" dirty="0"/>
+          </a:p>
+        </p:txBody>
+      </p:sp>
+      <p:sp>
+        <p:nvSpPr>
+          <p:cNvPr id="23" name="Text 19"/>
+          <p:cNvSpPr/>
+          <p:nvPr/>
+        </p:nvSpPr>
+        <p:spPr>
+          <a:xfrm>
+            <a:off x="8320785" y="3550047"/>
+            <a:ext cx="3056582" cy="687388"/>
+          </a:xfrm>
+          <a:prstGeom prst="rect">
+            <a:avLst/>
+          </a:prstGeom>
+          <a:noFill/>
+          <a:ln/>
+        </p:spPr>
+        <p:txBody>
+          <a:bodyPr wrap="square" lIns="0" tIns="0" rIns="0" bIns="0" rtlCol="0" anchor="t"/>
+          <a:lstStyle/>
+          <a:p>
+            <a:pPr algn="l" indent="0" marL="0">
+              <a:lnSpc>
+                <a:spcPts val="2706"/>
+              </a:lnSpc>
+              <a:spcBef>
+                <a:spcPts val="1067"/>
+              </a:spcBef>
+              <a:buNone/>
+            </a:pPr>
+            <a:r>
+              <a:rPr lang="en-US" sz="1866" dirty="0">
+                <a:solidFill>
+                  <a:srgbClr val="0A0A0A"/>
+                </a:solidFill>
+                <a:latin typeface="Arimo" pitchFamily="34" charset="0"/>
+                <a:ea typeface="Arimo" pitchFamily="34" charset="-122"/>
+                <a:cs typeface="Arimo" pitchFamily="34" charset="-120"/>
+              </a:rPr>
+              <a:t>Can only a person take that step?</a:t>
+            </a:r>
+            <a:endParaRPr lang="en-US" sz="1866" dirty="0"/>
+          </a:p>
+        </p:txBody>
+      </p:sp>
+      <p:sp>
+        <p:nvSpPr>
+          <p:cNvPr id="24" name="Text 20"/>
+          <p:cNvSpPr/>
+          <p:nvPr/>
+        </p:nvSpPr>
+        <p:spPr>
+          <a:xfrm>
+            <a:off x="8117636" y="4242991"/>
+            <a:ext cx="3402947" cy="507603"/>
+          </a:xfrm>
+          <a:prstGeom prst="rect">
+            <a:avLst/>
+          </a:prstGeom>
+          <a:solidFill>
+            <a:srgbClr val="E6E6E6"/>
+          </a:solidFill>
+          <a:ln/>
+        </p:spPr>
+        <p:txBody>
+          <a:bodyPr wrap="square" rtlCol="0" anchor="ctr"/>
+          <a:lstStyle/>
+          <a:p>
+            <a:pPr indent="0" marL="0">
+              <a:buNone/>
+            </a:pPr>
+            <a:endParaRPr lang="en-US" dirty="0"/>
+          </a:p>
+        </p:txBody>
+      </p:sp>
+      <p:sp>
+        <p:nvSpPr>
+          <p:cNvPr id="25" name="Text 21"/>
+          <p:cNvSpPr/>
+          <p:nvPr/>
+        </p:nvSpPr>
+        <p:spPr>
+          <a:xfrm>
+            <a:off x="8320785" y="4378325"/>
+            <a:ext cx="3056582" cy="236934"/>
+          </a:xfrm>
+          <a:prstGeom prst="rect">
+            <a:avLst/>
+          </a:prstGeom>
+          <a:noFill/>
+          <a:ln/>
+        </p:spPr>
+        <p:txBody>
+          <a:bodyPr wrap="square" lIns="0" tIns="0" rIns="0" bIns="0" rtlCol="0" anchor="t"/>
+          <a:lstStyle/>
+          <a:p>
+            <a:pPr algn="l" indent="0" marL="0">
+              <a:lnSpc>
+                <a:spcPts val="1866"/>
+              </a:lnSpc>
+              <a:buNone/>
+            </a:pPr>
+            <a:r>
+              <a:rPr lang="en-US" sz="1333" b="1" dirty="0">
+                <a:solidFill>
+                  <a:srgbClr val="3D3D3D"/>
+                </a:solidFill>
+                <a:latin typeface="Arimo" pitchFamily="34" charset="0"/>
+                <a:ea typeface="Arimo" pitchFamily="34" charset="-122"/>
+                <a:cs typeface="Arimo" pitchFamily="34" charset="-120"/>
+              </a:rPr>
+              <a:t>IF NO · AUTOMATE IT</a:t>
+            </a:r>
+            <a:endParaRPr lang="en-US" sz="1333" dirty="0"/>
+          </a:p>
+        </p:txBody>
+      </p:sp>
+      <p:sp>
+        <p:nvSpPr>
+          <p:cNvPr id="26" name="Text 22"/>
+          <p:cNvSpPr/>
+          <p:nvPr/>
+        </p:nvSpPr>
+        <p:spPr>
+          <a:xfrm>
+            <a:off x="643174" y="5012928"/>
+            <a:ext cx="10902605" cy="702469"/>
+          </a:xfrm>
+          <a:prstGeom prst="rect">
+            <a:avLst/>
+          </a:prstGeom>
+          <a:solidFill>
+            <a:srgbClr val="0A0A0A"/>
+          </a:solidFill>
+          <a:ln/>
+        </p:spPr>
+        <p:txBody>
+          <a:bodyPr wrap="square" rtlCol="0" anchor="ctr"/>
+          <a:lstStyle/>
+          <a:p>
+            <a:pPr indent="0" marL="0">
+              <a:buNone/>
+            </a:pPr>
+            <a:endParaRPr lang="en-US" dirty="0"/>
+          </a:p>
+        </p:txBody>
+      </p:sp>
+      <p:sp>
+        <p:nvSpPr>
+          <p:cNvPr id="27" name="Text 23"/>
+          <p:cNvSpPr/>
+          <p:nvPr/>
+        </p:nvSpPr>
+        <p:spPr>
+          <a:xfrm>
+            <a:off x="913973" y="5199063"/>
+            <a:ext cx="10568226" cy="330200"/>
+          </a:xfrm>
+          <a:prstGeom prst="rect">
+            <a:avLst/>
+          </a:prstGeom>
+          <a:noFill/>
+          <a:ln/>
+        </p:spPr>
+        <p:txBody>
+          <a:bodyPr wrap="square" lIns="0" tIns="0" rIns="0" bIns="0" rtlCol="0" anchor="t"/>
+          <a:lstStyle/>
+          <a:p>
+            <a:pPr algn="l" indent="0" marL="0">
+              <a:lnSpc>
+                <a:spcPts val="2600"/>
+              </a:lnSpc>
+              <a:buNone/>
+            </a:pPr>
+            <a:r>
+              <a:rPr lang="en-US" sz="2000" b="1" dirty="0">
+                <a:solidFill>
+                  <a:srgbClr val="FFFFFF"/>
+                </a:solidFill>
+                <a:latin typeface="Arimo" pitchFamily="34" charset="0"/>
+                <a:ea typeface="Arimo" pitchFamily="34" charset="-122"/>
+                <a:cs typeface="Arimo" pitchFamily="34" charset="-120"/>
+              </a:rPr>
+              <a:t>All three, or it is not a page. Two out of three is still someone's night.</a:t>
+            </a:r>
+            <a:endParaRPr lang="en-US" sz="2000" dirty="0"/>
+          </a:p>
+        </p:txBody>
+      </p:sp>
+      <p:sp>
+        <p:nvSpPr>
+          <p:cNvPr id="28" name="Text 24"/>
+          <p:cNvSpPr/>
+          <p:nvPr/>
+        </p:nvSpPr>
+        <p:spPr>
+          <a:xfrm>
+            <a:off x="643174" y="5884664"/>
+            <a:ext cx="10902605" cy="25400"/>
+          </a:xfrm>
+          <a:prstGeom prst="rect">
+            <a:avLst/>
+          </a:prstGeom>
+          <a:solidFill>
+            <a:srgbClr val="0A0A0A"/>
+          </a:solidFill>
+          <a:ln/>
+        </p:spPr>
+        <p:txBody>
+          <a:bodyPr wrap="square" rtlCol="0" anchor="ctr"/>
+          <a:lstStyle/>
+          <a:p>
+            <a:pPr indent="0" marL="0">
+              <a:buNone/>
+            </a:pPr>
+            <a:endParaRPr lang="en-US" dirty="0"/>
+          </a:p>
+        </p:txBody>
+      </p:sp>
+      <p:sp>
+        <p:nvSpPr>
+          <p:cNvPr id="29" name="Text 25"/>
+          <p:cNvSpPr/>
+          <p:nvPr/>
+        </p:nvSpPr>
+        <p:spPr>
+          <a:xfrm>
+            <a:off x="643174" y="5910064"/>
+            <a:ext cx="11120657" cy="304602"/>
+          </a:xfrm>
+          <a:prstGeom prst="rect">
+            <a:avLst/>
+          </a:prstGeom>
+          <a:noFill/>
+          <a:ln/>
+        </p:spPr>
+        <p:txBody>
+          <a:bodyPr wrap="square" lIns="0" tIns="67725" rIns="0" bIns="0" rtlCol="0" anchor="t"/>
+          <a:lstStyle/>
+          <a:p>
+            <a:pPr algn="l" indent="0" marL="0">
+              <a:lnSpc>
+                <a:spcPts val="1866"/>
+              </a:lnSpc>
+              <a:buNone/>
+            </a:pPr>
+            <a:r>
+              <a:rPr lang="en-US" sz="1333" dirty="0">
+                <a:solidFill>
+                  <a:srgbClr val="767676"/>
+                </a:solidFill>
+                <a:latin typeface="Arimo" pitchFamily="34" charset="0"/>
+                <a:ea typeface="Arimo" pitchFamily="34" charset="-122"/>
+                <a:cs typeface="Arimo" pitchFamily="34" charset="-120"/>
+              </a:rPr>
+              <a:t>ALERT DESIGN · SHEET 03/05 · NO CHART, NO EXTERNAL DATA</a:t>
+            </a:r>
+            <a:endParaRPr lang="en-US" sz="1333" dirty="0"/>
+          </a:p>
+        </p:txBody>
+      </p:sp>
     </p:spTree>
   </p:cSld>
   <p:clrMapOvr>
@@ -1357,6 +3584,13 @@
 <file path=ppt/slides/slide4.xml><?xml version="1.0" encoding="utf-8"?>
 <p:sld xmlns:a="http://schemas.openxmlformats.org/drawingml/2006/main" xmlns:r="http://schemas.openxmlformats.org/officeDocument/2006/relationships" xmlns:p="http://schemas.openxmlformats.org/presentationml/2006/main">
   <p:cSld name="Slide 4">
+    <p:bg>
+      <p:bgPr>
+        <a:solidFill>
+          <a:srgbClr val="FFFFFF"/>
+        </a:solidFill>
+      </p:bgPr>
+    </p:bg>
     <p:spTree>
       <p:nvGrpSpPr>
         <p:cNvPr id="1" name=""/>
@@ -1371,30 +3605,888 @@
           <a:chExt cx="0" cy="0"/>
         </a:xfrm>
       </p:grpSpPr>
-      <p:pic>
-        <p:nvPicPr>
-          <p:cNvPr id="2" name="Image 0" descr="/tmp/slide-1787840610072-bu7nha8rxme.png">    </p:cNvPr>
-          <p:cNvPicPr>
-            <a:picLocks noChangeAspect="1"/>
-          </p:cNvPicPr>
-          <p:nvPr/>
-        </p:nvPicPr>
-        <p:blipFill>
-          <a:blip r:embed="rId1"/>
-          <a:stretch>
-            <a:fillRect/>
-          </a:stretch>
-        </p:blipFill>
-        <p:spPr>
-          <a:xfrm>
-            <a:off x="0" y="0"/>
-            <a:ext cx="12188952" cy="6858000"/>
-          </a:xfrm>
-          <a:prstGeom prst="rect">
-            <a:avLst/>
-          </a:prstGeom>
-        </p:spPr>
-      </p:pic>
+      <p:sp>
+        <p:nvSpPr>
+          <p:cNvPr id="2" name="Text 0"/>
+          <p:cNvSpPr/>
+          <p:nvPr/>
+        </p:nvSpPr>
+        <p:spPr>
+          <a:xfrm>
+            <a:off x="643174" y="508000"/>
+            <a:ext cx="11120657" cy="236934"/>
+          </a:xfrm>
+          <a:prstGeom prst="rect">
+            <a:avLst/>
+          </a:prstGeom>
+          <a:noFill/>
+          <a:ln/>
+        </p:spPr>
+        <p:txBody>
+          <a:bodyPr wrap="square" lIns="0" tIns="0" rIns="0" bIns="0" rtlCol="0" anchor="t"/>
+          <a:lstStyle/>
+          <a:p>
+            <a:pPr algn="l" indent="0" marL="0">
+              <a:lnSpc>
+                <a:spcPts val="1866"/>
+              </a:lnSpc>
+              <a:spcAft>
+                <a:spcPts val="800"/>
+              </a:spcAft>
+              <a:buNone/>
+            </a:pPr>
+            <a:r>
+              <a:rPr lang="en-US" sz="1333" b="1" dirty="0">
+                <a:solidFill>
+                  <a:srgbClr val="3D3D3D"/>
+                </a:solidFill>
+                <a:latin typeface="Arimo" pitchFamily="34" charset="0"/>
+                <a:ea typeface="Arimo" pitchFamily="34" charset="-122"/>
+                <a:cs typeface="Arimo" pitchFamily="34" charset="-120"/>
+              </a:rPr>
+              <a:t>04 · DISPOSITION</a:t>
+            </a:r>
+            <a:endParaRPr lang="en-US" sz="1333" dirty="0"/>
+          </a:p>
+        </p:txBody>
+      </p:sp>
+      <p:sp>
+        <p:nvSpPr>
+          <p:cNvPr id="3" name="Text 1"/>
+          <p:cNvSpPr/>
+          <p:nvPr/>
+        </p:nvSpPr>
+        <p:spPr>
+          <a:xfrm>
+            <a:off x="643174" y="846534"/>
+            <a:ext cx="11120657" cy="487561"/>
+          </a:xfrm>
+          <a:prstGeom prst="rect">
+            <a:avLst/>
+          </a:prstGeom>
+          <a:noFill/>
+          <a:ln/>
+        </p:spPr>
+        <p:txBody>
+          <a:bodyPr wrap="square" lIns="0" tIns="0" rIns="0" bIns="0" rtlCol="0" anchor="t"/>
+          <a:lstStyle/>
+          <a:p>
+            <a:pPr algn="l" indent="0" marL="0">
+              <a:lnSpc>
+                <a:spcPts val="3840"/>
+              </a:lnSpc>
+              <a:spcAft>
+                <a:spcPts val="1067"/>
+              </a:spcAft>
+              <a:buNone/>
+            </a:pPr>
+            <a:r>
+              <a:rPr lang="en-US" sz="3200" b="1" dirty="0">
+                <a:solidFill>
+                  <a:srgbClr val="0A0A0A"/>
+                </a:solidFill>
+                <a:latin typeface="Arimo" pitchFamily="34" charset="0"/>
+                <a:ea typeface="Arimo" pitchFamily="34" charset="-122"/>
+                <a:cs typeface="Arimo" pitchFamily="34" charset="-120"/>
+              </a:rPr>
+              <a:t>What to do with the alerts that fail</a:t>
+            </a:r>
+            <a:endParaRPr lang="en-US" sz="3200" dirty="0"/>
+          </a:p>
+        </p:txBody>
+      </p:sp>
+      <p:sp>
+        <p:nvSpPr>
+          <p:cNvPr id="4" name="Text 2"/>
+          <p:cNvSpPr/>
+          <p:nvPr/>
+        </p:nvSpPr>
+        <p:spPr>
+          <a:xfrm>
+            <a:off x="643174" y="1469430"/>
+            <a:ext cx="11120657" cy="331986"/>
+          </a:xfrm>
+          <a:prstGeom prst="rect">
+            <a:avLst/>
+          </a:prstGeom>
+          <a:noFill/>
+          <a:ln/>
+        </p:spPr>
+        <p:txBody>
+          <a:bodyPr wrap="square" lIns="0" tIns="0" rIns="0" bIns="0" rtlCol="0" anchor="t"/>
+          <a:lstStyle/>
+          <a:p>
+            <a:pPr algn="l" indent="0" marL="0">
+              <a:lnSpc>
+                <a:spcPts val="2613"/>
+              </a:lnSpc>
+              <a:spcAft>
+                <a:spcPts val="1600"/>
+              </a:spcAft>
+              <a:buNone/>
+            </a:pPr>
+            <a:r>
+              <a:rPr lang="en-US" sz="1866" dirty="0">
+                <a:solidFill>
+                  <a:srgbClr val="3D3D3D"/>
+                </a:solidFill>
+                <a:latin typeface="Arimo" pitchFamily="34" charset="0"/>
+                <a:ea typeface="Arimo" pitchFamily="34" charset="-122"/>
+                <a:cs typeface="Arimo" pitchFamily="34" charset="-120"/>
+              </a:rPr>
+              <a:t>A failing alert is not left alone. It is deleted, downgraded, or fixed.</a:t>
+            </a:r>
+            <a:endParaRPr lang="en-US" sz="1866" dirty="0"/>
+          </a:p>
+        </p:txBody>
+      </p:sp>
+      <p:sp>
+        <p:nvSpPr>
+          <p:cNvPr id="5" name="Text 3"/>
+          <p:cNvSpPr/>
+          <p:nvPr/>
+        </p:nvSpPr>
+        <p:spPr>
+          <a:xfrm>
+            <a:off x="643174" y="2004616"/>
+            <a:ext cx="10902605" cy="50800"/>
+          </a:xfrm>
+          <a:prstGeom prst="rect">
+            <a:avLst/>
+          </a:prstGeom>
+          <a:solidFill>
+            <a:srgbClr val="0A0A0A"/>
+          </a:solidFill>
+          <a:ln/>
+        </p:spPr>
+        <p:txBody>
+          <a:bodyPr wrap="square" rtlCol="0" anchor="ctr"/>
+          <a:lstStyle/>
+          <a:p>
+            <a:pPr indent="0" marL="0">
+              <a:buNone/>
+            </a:pPr>
+            <a:endParaRPr lang="en-US" dirty="0"/>
+          </a:p>
+        </p:txBody>
+      </p:sp>
+      <p:sp>
+        <p:nvSpPr>
+          <p:cNvPr id="6" name="Text 4"/>
+          <p:cNvSpPr/>
+          <p:nvPr/>
+        </p:nvSpPr>
+        <p:spPr>
+          <a:xfrm>
+            <a:off x="643174" y="2292350"/>
+            <a:ext cx="10902605" cy="3423047"/>
+          </a:xfrm>
+          <a:prstGeom prst="rect">
+            <a:avLst/>
+          </a:prstGeom>
+          <a:noFill/>
+          <a:ln w="25397">
+            <a:solidFill>
+              <a:srgbClr val="0A0A0A"/>
+            </a:solidFill>
+          </a:ln>
+        </p:spPr>
+        <p:txBody>
+          <a:bodyPr wrap="square" rtlCol="0" anchor="ctr"/>
+          <a:lstStyle/>
+          <a:p>
+            <a:pPr indent="0" marL="0">
+              <a:buNone/>
+            </a:pPr>
+            <a:endParaRPr lang="en-US" dirty="0"/>
+          </a:p>
+        </p:txBody>
+      </p:sp>
+      <p:sp>
+        <p:nvSpPr>
+          <p:cNvPr id="7" name="Shape 5"/>
+          <p:cNvSpPr/>
+          <p:nvPr/>
+        </p:nvSpPr>
+        <p:spPr>
+          <a:xfrm>
+            <a:off x="3703108" y="2317750"/>
+            <a:ext cx="0" cy="1107083"/>
+          </a:xfrm>
+          <a:prstGeom prst="line">
+            <a:avLst/>
+          </a:prstGeom>
+          <a:noFill/>
+          <a:ln w="25397">
+            <a:solidFill>
+              <a:srgbClr val="0A0A0A"/>
+            </a:solidFill>
+            <a:prstDash val="solid"/>
+          </a:ln>
+        </p:spPr>
+      </p:sp>
+      <p:sp>
+        <p:nvSpPr>
+          <p:cNvPr id="8" name="Text 6"/>
+          <p:cNvSpPr/>
+          <p:nvPr/>
+        </p:nvSpPr>
+        <p:spPr>
+          <a:xfrm>
+            <a:off x="905442" y="2685058"/>
+            <a:ext cx="372374" cy="372467"/>
+          </a:xfrm>
+          <a:prstGeom prst="rect">
+            <a:avLst/>
+          </a:prstGeom>
+          <a:solidFill>
+            <a:srgbClr val="0A0A0A"/>
+          </a:solidFill>
+          <a:ln/>
+        </p:spPr>
+        <p:txBody>
+          <a:bodyPr wrap="square" rtlCol="0" anchor="ctr"/>
+          <a:lstStyle/>
+          <a:p>
+            <a:pPr indent="0" marL="0">
+              <a:buNone/>
+            </a:pPr>
+            <a:endParaRPr lang="en-US" dirty="0"/>
+          </a:p>
+        </p:txBody>
+      </p:sp>
+      <p:sp>
+        <p:nvSpPr>
+          <p:cNvPr id="9" name="Text 7"/>
+          <p:cNvSpPr/>
+          <p:nvPr/>
+        </p:nvSpPr>
+        <p:spPr>
+          <a:xfrm>
+            <a:off x="1015349" y="2729111"/>
+            <a:ext cx="155409" cy="284361"/>
+          </a:xfrm>
+          <a:prstGeom prst="rect">
+            <a:avLst/>
+          </a:prstGeom>
+          <a:noFill/>
+          <a:ln/>
+        </p:spPr>
+        <p:txBody>
+          <a:bodyPr wrap="square" lIns="0" tIns="0" rIns="0" bIns="0" rtlCol="0" anchor="t"/>
+          <a:lstStyle/>
+          <a:p>
+            <a:pPr algn="l" indent="0" marL="0">
+              <a:lnSpc>
+                <a:spcPts val="2240"/>
+              </a:lnSpc>
+              <a:buNone/>
+            </a:pPr>
+            <a:r>
+              <a:rPr lang="en-US" sz="1600" b="1" dirty="0">
+                <a:solidFill>
+                  <a:srgbClr val="FFFFFF"/>
+                </a:solidFill>
+                <a:latin typeface="Arimo" pitchFamily="34" charset="0"/>
+                <a:ea typeface="Arimo" pitchFamily="34" charset="-122"/>
+                <a:cs typeface="Arimo" pitchFamily="34" charset="-120"/>
+              </a:rPr>
+              <a:t>A</a:t>
+            </a:r>
+            <a:endParaRPr lang="en-US" sz="1600" dirty="0"/>
+          </a:p>
+        </p:txBody>
+      </p:sp>
+      <p:sp>
+        <p:nvSpPr>
+          <p:cNvPr id="10" name="Text 8"/>
+          <p:cNvSpPr/>
+          <p:nvPr/>
+        </p:nvSpPr>
+        <p:spPr>
+          <a:xfrm>
+            <a:off x="1480966" y="2684066"/>
+            <a:ext cx="1188030" cy="374253"/>
+          </a:xfrm>
+          <a:prstGeom prst="rect">
+            <a:avLst/>
+          </a:prstGeom>
+          <a:noFill/>
+          <a:ln/>
+        </p:spPr>
+        <p:txBody>
+          <a:bodyPr wrap="square" lIns="0" tIns="0" rIns="0" bIns="0" rtlCol="0" anchor="t"/>
+          <a:lstStyle/>
+          <a:p>
+            <a:pPr algn="l" indent="0" marL="0">
+              <a:lnSpc>
+                <a:spcPts val="2946"/>
+              </a:lnSpc>
+              <a:buNone/>
+            </a:pPr>
+            <a:r>
+              <a:rPr lang="en-US" sz="2266" b="1" dirty="0">
+                <a:solidFill>
+                  <a:srgbClr val="0A0A0A"/>
+                </a:solidFill>
+                <a:latin typeface="Arimo" pitchFamily="34" charset="0"/>
+                <a:ea typeface="Arimo" pitchFamily="34" charset="-122"/>
+                <a:cs typeface="Arimo" pitchFamily="34" charset="-120"/>
+              </a:rPr>
+              <a:t>DELETE</a:t>
+            </a:r>
+            <a:endParaRPr lang="en-US" sz="2266" dirty="0"/>
+          </a:p>
+        </p:txBody>
+      </p:sp>
+      <p:sp>
+        <p:nvSpPr>
+          <p:cNvPr id="11" name="Text 9"/>
+          <p:cNvSpPr/>
+          <p:nvPr/>
+        </p:nvSpPr>
+        <p:spPr>
+          <a:xfrm>
+            <a:off x="3952680" y="2527498"/>
+            <a:ext cx="7477446" cy="687388"/>
+          </a:xfrm>
+          <a:prstGeom prst="rect">
+            <a:avLst/>
+          </a:prstGeom>
+          <a:noFill/>
+          <a:ln/>
+        </p:spPr>
+        <p:txBody>
+          <a:bodyPr wrap="square" lIns="0" tIns="0" rIns="0" bIns="0" rtlCol="0" anchor="t"/>
+          <a:lstStyle/>
+          <a:p>
+            <a:pPr algn="l" indent="0" marL="0">
+              <a:lnSpc>
+                <a:spcPts val="2706"/>
+              </a:lnSpc>
+              <a:buNone/>
+            </a:pPr>
+            <a:r>
+              <a:rPr lang="en-US" sz="1866" dirty="0">
+                <a:solidFill>
+                  <a:srgbClr val="0A0A0A"/>
+                </a:solidFill>
+                <a:latin typeface="Arimo" pitchFamily="34" charset="0"/>
+                <a:ea typeface="Arimo" pitchFamily="34" charset="-122"/>
+                <a:cs typeface="Arimo" pitchFamily="34" charset="-120"/>
+              </a:rPr>
+              <a:t>It has never once changed what anyone did. Deleting it removes noise and nothing else; the check that produced it can stay.</a:t>
+            </a:r>
+            <a:endParaRPr lang="en-US" sz="1866" dirty="0"/>
+          </a:p>
+        </p:txBody>
+      </p:sp>
+      <p:sp>
+        <p:nvSpPr>
+          <p:cNvPr id="12" name="Shape 10"/>
+          <p:cNvSpPr/>
+          <p:nvPr/>
+        </p:nvSpPr>
+        <p:spPr>
+          <a:xfrm>
+            <a:off x="668567" y="3437533"/>
+            <a:ext cx="10851818" cy="0"/>
+          </a:xfrm>
+          <a:prstGeom prst="line">
+            <a:avLst/>
+          </a:prstGeom>
+          <a:noFill/>
+          <a:ln w="25397">
+            <a:solidFill>
+              <a:srgbClr val="0A0A0A"/>
+            </a:solidFill>
+            <a:prstDash val="solid"/>
+          </a:ln>
+        </p:spPr>
+      </p:sp>
+      <p:sp>
+        <p:nvSpPr>
+          <p:cNvPr id="13" name="Shape 11"/>
+          <p:cNvSpPr/>
+          <p:nvPr/>
+        </p:nvSpPr>
+        <p:spPr>
+          <a:xfrm>
+            <a:off x="3703108" y="3450233"/>
+            <a:ext cx="0" cy="1107083"/>
+          </a:xfrm>
+          <a:prstGeom prst="line">
+            <a:avLst/>
+          </a:prstGeom>
+          <a:noFill/>
+          <a:ln w="25397">
+            <a:solidFill>
+              <a:srgbClr val="0A0A0A"/>
+            </a:solidFill>
+            <a:prstDash val="solid"/>
+          </a:ln>
+        </p:spPr>
+      </p:sp>
+      <p:sp>
+        <p:nvSpPr>
+          <p:cNvPr id="14" name="Text 12"/>
+          <p:cNvSpPr/>
+          <p:nvPr/>
+        </p:nvSpPr>
+        <p:spPr>
+          <a:xfrm>
+            <a:off x="905442" y="3817541"/>
+            <a:ext cx="372374" cy="372467"/>
+          </a:xfrm>
+          <a:prstGeom prst="rect">
+            <a:avLst/>
+          </a:prstGeom>
+          <a:solidFill>
+            <a:srgbClr val="0A0A0A"/>
+          </a:solidFill>
+          <a:ln/>
+        </p:spPr>
+        <p:txBody>
+          <a:bodyPr wrap="square" rtlCol="0" anchor="ctr"/>
+          <a:lstStyle/>
+          <a:p>
+            <a:pPr indent="0" marL="0">
+              <a:buNone/>
+            </a:pPr>
+            <a:endParaRPr lang="en-US" dirty="0"/>
+          </a:p>
+        </p:txBody>
+      </p:sp>
+      <p:sp>
+        <p:nvSpPr>
+          <p:cNvPr id="15" name="Text 13"/>
+          <p:cNvSpPr/>
+          <p:nvPr/>
+        </p:nvSpPr>
+        <p:spPr>
+          <a:xfrm>
+            <a:off x="1015349" y="3861594"/>
+            <a:ext cx="155409" cy="284361"/>
+          </a:xfrm>
+          <a:prstGeom prst="rect">
+            <a:avLst/>
+          </a:prstGeom>
+          <a:noFill/>
+          <a:ln/>
+        </p:spPr>
+        <p:txBody>
+          <a:bodyPr wrap="square" lIns="0" tIns="0" rIns="0" bIns="0" rtlCol="0" anchor="t"/>
+          <a:lstStyle/>
+          <a:p>
+            <a:pPr algn="l" indent="0" marL="0">
+              <a:lnSpc>
+                <a:spcPts val="2240"/>
+              </a:lnSpc>
+              <a:buNone/>
+            </a:pPr>
+            <a:r>
+              <a:rPr lang="en-US" sz="1600" b="1" dirty="0">
+                <a:solidFill>
+                  <a:srgbClr val="FFFFFF"/>
+                </a:solidFill>
+                <a:latin typeface="Arimo" pitchFamily="34" charset="0"/>
+                <a:ea typeface="Arimo" pitchFamily="34" charset="-122"/>
+                <a:cs typeface="Arimo" pitchFamily="34" charset="-120"/>
+              </a:rPr>
+              <a:t>B</a:t>
+            </a:r>
+            <a:endParaRPr lang="en-US" sz="1600" dirty="0"/>
+          </a:p>
+        </p:txBody>
+      </p:sp>
+      <p:sp>
+        <p:nvSpPr>
+          <p:cNvPr id="16" name="Text 14"/>
+          <p:cNvSpPr/>
+          <p:nvPr/>
+        </p:nvSpPr>
+        <p:spPr>
+          <a:xfrm>
+            <a:off x="1480966" y="3816548"/>
+            <a:ext cx="2021533" cy="374253"/>
+          </a:xfrm>
+          <a:prstGeom prst="rect">
+            <a:avLst/>
+          </a:prstGeom>
+          <a:noFill/>
+          <a:ln/>
+        </p:spPr>
+        <p:txBody>
+          <a:bodyPr wrap="square" lIns="0" tIns="0" rIns="0" bIns="0" rtlCol="0" anchor="t"/>
+          <a:lstStyle/>
+          <a:p>
+            <a:pPr algn="l" indent="0" marL="0">
+              <a:lnSpc>
+                <a:spcPts val="2946"/>
+              </a:lnSpc>
+              <a:buNone/>
+            </a:pPr>
+            <a:r>
+              <a:rPr lang="en-US" sz="2266" b="1" dirty="0">
+                <a:solidFill>
+                  <a:srgbClr val="0A0A0A"/>
+                </a:solidFill>
+                <a:latin typeface="Arimo" pitchFamily="34" charset="0"/>
+                <a:ea typeface="Arimo" pitchFamily="34" charset="-122"/>
+                <a:cs typeface="Arimo" pitchFamily="34" charset="-120"/>
+              </a:rPr>
+              <a:t>DOWNGRADE</a:t>
+            </a:r>
+            <a:endParaRPr lang="en-US" sz="2266" dirty="0"/>
+          </a:p>
+        </p:txBody>
+      </p:sp>
+      <p:sp>
+        <p:nvSpPr>
+          <p:cNvPr id="17" name="Text 15"/>
+          <p:cNvSpPr/>
+          <p:nvPr/>
+        </p:nvSpPr>
+        <p:spPr>
+          <a:xfrm>
+            <a:off x="3952680" y="3659981"/>
+            <a:ext cx="7477446" cy="687388"/>
+          </a:xfrm>
+          <a:prstGeom prst="rect">
+            <a:avLst/>
+          </a:prstGeom>
+          <a:noFill/>
+          <a:ln/>
+        </p:spPr>
+        <p:txBody>
+          <a:bodyPr wrap="square" lIns="0" tIns="0" rIns="0" bIns="0" rtlCol="0" anchor="t"/>
+          <a:lstStyle/>
+          <a:p>
+            <a:pPr algn="l" indent="0" marL="0">
+              <a:lnSpc>
+                <a:spcPts val="2706"/>
+              </a:lnSpc>
+              <a:buNone/>
+            </a:pPr>
+            <a:r>
+              <a:rPr lang="en-US" sz="1866" dirty="0">
+                <a:solidFill>
+                  <a:srgbClr val="0A0A0A"/>
+                </a:solidFill>
+                <a:latin typeface="Arimo" pitchFamily="34" charset="0"/>
+                <a:ea typeface="Arimo" pitchFamily="34" charset="-122"/>
+                <a:cs typeface="Arimo" pitchFamily="34" charset="-120"/>
+              </a:rPr>
+              <a:t>The condition is real and it can wait. Move it to a queue with a named owner and a date. A promise is not the same as silence.</a:t>
+            </a:r>
+            <a:endParaRPr lang="en-US" sz="1866" dirty="0"/>
+          </a:p>
+        </p:txBody>
+      </p:sp>
+      <p:sp>
+        <p:nvSpPr>
+          <p:cNvPr id="18" name="Text 16"/>
+          <p:cNvSpPr/>
+          <p:nvPr/>
+        </p:nvSpPr>
+        <p:spPr>
+          <a:xfrm>
+            <a:off x="668567" y="4557316"/>
+            <a:ext cx="10851818" cy="1132483"/>
+          </a:xfrm>
+          <a:prstGeom prst="rect">
+            <a:avLst/>
+          </a:prstGeom>
+          <a:solidFill>
+            <a:srgbClr val="0A0A0A"/>
+          </a:solidFill>
+          <a:ln/>
+        </p:spPr>
+        <p:txBody>
+          <a:bodyPr wrap="square" rtlCol="0" anchor="ctr"/>
+          <a:lstStyle/>
+          <a:p>
+            <a:pPr indent="0" marL="0">
+              <a:buNone/>
+            </a:pPr>
+            <a:endParaRPr lang="en-US" dirty="0"/>
+          </a:p>
+        </p:txBody>
+      </p:sp>
+      <p:sp>
+        <p:nvSpPr>
+          <p:cNvPr id="19" name="Shape 17"/>
+          <p:cNvSpPr/>
+          <p:nvPr/>
+        </p:nvSpPr>
+        <p:spPr>
+          <a:xfrm>
+            <a:off x="668567" y="4570016"/>
+            <a:ext cx="10851818" cy="0"/>
+          </a:xfrm>
+          <a:prstGeom prst="line">
+            <a:avLst/>
+          </a:prstGeom>
+          <a:noFill/>
+          <a:ln w="25397">
+            <a:solidFill>
+              <a:srgbClr val="0A0A0A"/>
+            </a:solidFill>
+            <a:prstDash val="solid"/>
+          </a:ln>
+        </p:spPr>
+      </p:sp>
+      <p:sp>
+        <p:nvSpPr>
+          <p:cNvPr id="20" name="Shape 18"/>
+          <p:cNvSpPr/>
+          <p:nvPr/>
+        </p:nvSpPr>
+        <p:spPr>
+          <a:xfrm>
+            <a:off x="3703108" y="4582716"/>
+            <a:ext cx="0" cy="1107083"/>
+          </a:xfrm>
+          <a:prstGeom prst="line">
+            <a:avLst/>
+          </a:prstGeom>
+          <a:noFill/>
+          <a:ln w="25397">
+            <a:solidFill>
+              <a:srgbClr val="FFFFFF"/>
+            </a:solidFill>
+            <a:prstDash val="solid"/>
+          </a:ln>
+        </p:spPr>
+      </p:sp>
+      <p:sp>
+        <p:nvSpPr>
+          <p:cNvPr id="21" name="Text 19"/>
+          <p:cNvSpPr/>
+          <p:nvPr/>
+        </p:nvSpPr>
+        <p:spPr>
+          <a:xfrm>
+            <a:off x="905442" y="4950023"/>
+            <a:ext cx="372374" cy="372467"/>
+          </a:xfrm>
+          <a:prstGeom prst="rect">
+            <a:avLst/>
+          </a:prstGeom>
+          <a:solidFill>
+            <a:srgbClr val="FFFFFF"/>
+          </a:solidFill>
+          <a:ln/>
+        </p:spPr>
+        <p:txBody>
+          <a:bodyPr wrap="square" rtlCol="0" anchor="ctr"/>
+          <a:lstStyle/>
+          <a:p>
+            <a:pPr indent="0" marL="0">
+              <a:buNone/>
+            </a:pPr>
+            <a:endParaRPr lang="en-US" dirty="0"/>
+          </a:p>
+        </p:txBody>
+      </p:sp>
+      <p:sp>
+        <p:nvSpPr>
+          <p:cNvPr id="22" name="Text 20"/>
+          <p:cNvSpPr/>
+          <p:nvPr/>
+        </p:nvSpPr>
+        <p:spPr>
+          <a:xfrm>
+            <a:off x="1015349" y="4994077"/>
+            <a:ext cx="155409" cy="284361"/>
+          </a:xfrm>
+          <a:prstGeom prst="rect">
+            <a:avLst/>
+          </a:prstGeom>
+          <a:noFill/>
+          <a:ln/>
+        </p:spPr>
+        <p:txBody>
+          <a:bodyPr wrap="square" lIns="0" tIns="0" rIns="0" bIns="0" rtlCol="0" anchor="t"/>
+          <a:lstStyle/>
+          <a:p>
+            <a:pPr algn="l" indent="0" marL="0">
+              <a:lnSpc>
+                <a:spcPts val="2240"/>
+              </a:lnSpc>
+              <a:buNone/>
+            </a:pPr>
+            <a:r>
+              <a:rPr lang="en-US" sz="1600" b="1" dirty="0">
+                <a:solidFill>
+                  <a:srgbClr val="0A0A0A"/>
+                </a:solidFill>
+                <a:latin typeface="Arimo" pitchFamily="34" charset="0"/>
+                <a:ea typeface="Arimo" pitchFamily="34" charset="-122"/>
+                <a:cs typeface="Arimo" pitchFamily="34" charset="-120"/>
+              </a:rPr>
+              <a:t>C</a:t>
+            </a:r>
+            <a:endParaRPr lang="en-US" sz="1600" dirty="0"/>
+          </a:p>
+        </p:txBody>
+      </p:sp>
+      <p:sp>
+        <p:nvSpPr>
+          <p:cNvPr id="23" name="Text 21"/>
+          <p:cNvSpPr/>
+          <p:nvPr/>
+        </p:nvSpPr>
+        <p:spPr>
+          <a:xfrm>
+            <a:off x="1480966" y="4949031"/>
+            <a:ext cx="471084" cy="374253"/>
+          </a:xfrm>
+          <a:prstGeom prst="rect">
+            <a:avLst/>
+          </a:prstGeom>
+          <a:noFill/>
+          <a:ln/>
+        </p:spPr>
+        <p:txBody>
+          <a:bodyPr wrap="square" lIns="0" tIns="0" rIns="0" bIns="0" rtlCol="0" anchor="t"/>
+          <a:lstStyle/>
+          <a:p>
+            <a:pPr algn="l" indent="0" marL="0">
+              <a:lnSpc>
+                <a:spcPts val="2946"/>
+              </a:lnSpc>
+              <a:buNone/>
+            </a:pPr>
+            <a:r>
+              <a:rPr lang="en-US" sz="2266" b="1" dirty="0">
+                <a:solidFill>
+                  <a:srgbClr val="FFFFFF"/>
+                </a:solidFill>
+                <a:latin typeface="Arimo" pitchFamily="34" charset="0"/>
+                <a:ea typeface="Arimo" pitchFamily="34" charset="-122"/>
+                <a:cs typeface="Arimo" pitchFamily="34" charset="-120"/>
+              </a:rPr>
+              <a:t>FIX</a:t>
+            </a:r>
+            <a:endParaRPr lang="en-US" sz="2266" dirty="0"/>
+          </a:p>
+        </p:txBody>
+      </p:sp>
+      <p:sp>
+        <p:nvSpPr>
+          <p:cNvPr id="24" name="Text 22"/>
+          <p:cNvSpPr/>
+          <p:nvPr/>
+        </p:nvSpPr>
+        <p:spPr>
+          <a:xfrm>
+            <a:off x="3952680" y="4792464"/>
+            <a:ext cx="7477446" cy="687388"/>
+          </a:xfrm>
+          <a:prstGeom prst="rect">
+            <a:avLst/>
+          </a:prstGeom>
+          <a:noFill/>
+          <a:ln/>
+        </p:spPr>
+        <p:txBody>
+          <a:bodyPr wrap="square" lIns="0" tIns="0" rIns="0" bIns="0" rtlCol="0" anchor="t"/>
+          <a:lstStyle/>
+          <a:p>
+            <a:pPr algn="l" indent="0" marL="0">
+              <a:lnSpc>
+                <a:spcPts val="2706"/>
+              </a:lnSpc>
+              <a:buNone/>
+            </a:pPr>
+            <a:r>
+              <a:rPr lang="en-US" sz="1866" dirty="0">
+                <a:solidFill>
+                  <a:srgbClr val="FFFFFF"/>
+                </a:solidFill>
+                <a:latin typeface="Arimo" pitchFamily="34" charset="0"/>
+                <a:ea typeface="Arimo" pitchFamily="34" charset="-122"/>
+                <a:cs typeface="Arimo" pitchFamily="34" charset="-120"/>
+              </a:rPr>
+              <a:t>It fires because the system needs a human to survive. Repair the system and the alert deletes itself. Only this one lowers the count.</a:t>
+            </a:r>
+            <a:endParaRPr lang="en-US" sz="1866" dirty="0"/>
+          </a:p>
+        </p:txBody>
+      </p:sp>
+      <p:sp>
+        <p:nvSpPr>
+          <p:cNvPr id="25" name="Text 23"/>
+          <p:cNvSpPr/>
+          <p:nvPr/>
+        </p:nvSpPr>
+        <p:spPr>
+          <a:xfrm>
+            <a:off x="643174" y="5884664"/>
+            <a:ext cx="10902605" cy="25400"/>
+          </a:xfrm>
+          <a:prstGeom prst="rect">
+            <a:avLst/>
+          </a:prstGeom>
+          <a:solidFill>
+            <a:srgbClr val="0A0A0A"/>
+          </a:solidFill>
+          <a:ln/>
+        </p:spPr>
+        <p:txBody>
+          <a:bodyPr wrap="square" rtlCol="0" anchor="ctr"/>
+          <a:lstStyle/>
+          <a:p>
+            <a:pPr indent="0" marL="0">
+              <a:buNone/>
+            </a:pPr>
+            <a:endParaRPr lang="en-US" dirty="0"/>
+          </a:p>
+        </p:txBody>
+      </p:sp>
+      <p:sp>
+        <p:nvSpPr>
+          <p:cNvPr id="26" name="Text 24"/>
+          <p:cNvSpPr/>
+          <p:nvPr/>
+        </p:nvSpPr>
+        <p:spPr>
+          <a:xfrm>
+            <a:off x="643174" y="5910064"/>
+            <a:ext cx="11120657" cy="304602"/>
+          </a:xfrm>
+          <a:prstGeom prst="rect">
+            <a:avLst/>
+          </a:prstGeom>
+          <a:noFill/>
+          <a:ln/>
+        </p:spPr>
+        <p:txBody>
+          <a:bodyPr wrap="square" lIns="0" tIns="67725" rIns="0" bIns="0" rtlCol="0" anchor="t"/>
+          <a:lstStyle/>
+          <a:p>
+            <a:pPr algn="l" indent="0" marL="0">
+              <a:lnSpc>
+                <a:spcPts val="1866"/>
+              </a:lnSpc>
+              <a:buNone/>
+            </a:pPr>
+            <a:r>
+              <a:rPr lang="en-US" sz="1333" dirty="0">
+                <a:solidFill>
+                  <a:srgbClr val="767676"/>
+                </a:solidFill>
+                <a:latin typeface="Arimo" pitchFamily="34" charset="0"/>
+                <a:ea typeface="Arimo" pitchFamily="34" charset="-122"/>
+                <a:cs typeface="Arimo" pitchFamily="34" charset="-120"/>
+              </a:rPr>
+              <a:t>ALERT DESIGN · SHEET 04/05 · NO CHART, NO EXTERNAL DATA</a:t>
+            </a:r>
+            <a:endParaRPr lang="en-US" sz="1333" dirty="0"/>
+          </a:p>
+        </p:txBody>
+      </p:sp>
     </p:spTree>
   </p:cSld>
   <p:clrMapOvr>
@@ -1406,6 +4498,13 @@
 <file path=ppt/slides/slide5.xml><?xml version="1.0" encoding="utf-8"?>
 <p:sld xmlns:a="http://schemas.openxmlformats.org/drawingml/2006/main" xmlns:r="http://schemas.openxmlformats.org/officeDocument/2006/relationships" xmlns:p="http://schemas.openxmlformats.org/presentationml/2006/main">
   <p:cSld name="Slide 5">
+    <p:bg>
+      <p:bgPr>
+        <a:solidFill>
+          <a:srgbClr val="FFFFFF"/>
+        </a:solidFill>
+      </p:bgPr>
+    </p:bg>
     <p:spTree>
       <p:nvGrpSpPr>
         <p:cNvPr id="1" name=""/>
@@ -1420,30 +4519,726 @@
           <a:chExt cx="0" cy="0"/>
         </a:xfrm>
       </p:grpSpPr>
-      <p:pic>
-        <p:nvPicPr>
-          <p:cNvPr id="2" name="Image 0" descr="/tmp/slide-1787840610383-wbq080qtzv.png">    </p:cNvPr>
-          <p:cNvPicPr>
-            <a:picLocks noChangeAspect="1"/>
-          </p:cNvPicPr>
-          <p:nvPr/>
-        </p:nvPicPr>
-        <p:blipFill>
-          <a:blip r:embed="rId1"/>
-          <a:stretch>
-            <a:fillRect/>
-          </a:stretch>
-        </p:blipFill>
-        <p:spPr>
-          <a:xfrm>
-            <a:off x="0" y="0"/>
-            <a:ext cx="12188952" cy="6858000"/>
-          </a:xfrm>
-          <a:prstGeom prst="rect">
-            <a:avLst/>
-          </a:prstGeom>
-        </p:spPr>
-      </p:pic>
+      <p:sp>
+        <p:nvSpPr>
+          <p:cNvPr id="2" name="Text 0"/>
+          <p:cNvSpPr/>
+          <p:nvPr/>
+        </p:nvSpPr>
+        <p:spPr>
+          <a:xfrm>
+            <a:off x="643174" y="508000"/>
+            <a:ext cx="11120657" cy="236934"/>
+          </a:xfrm>
+          <a:prstGeom prst="rect">
+            <a:avLst/>
+          </a:prstGeom>
+          <a:noFill/>
+          <a:ln/>
+        </p:spPr>
+        <p:txBody>
+          <a:bodyPr wrap="square" lIns="0" tIns="0" rIns="0" bIns="0" rtlCol="0" anchor="t"/>
+          <a:lstStyle/>
+          <a:p>
+            <a:pPr algn="l" indent="0" marL="0">
+              <a:lnSpc>
+                <a:spcPts val="1866"/>
+              </a:lnSpc>
+              <a:spcAft>
+                <a:spcPts val="800"/>
+              </a:spcAft>
+              <a:buNone/>
+            </a:pPr>
+            <a:r>
+              <a:rPr lang="en-US" sz="1333" b="1" dirty="0">
+                <a:solidFill>
+                  <a:srgbClr val="3D3D3D"/>
+                </a:solidFill>
+                <a:latin typeface="Arimo" pitchFamily="34" charset="0"/>
+                <a:ea typeface="Arimo" pitchFamily="34" charset="-122"/>
+                <a:cs typeface="Arimo" pitchFamily="34" charset="-120"/>
+              </a:rPr>
+              <a:t>05 · OPEN QUESTIONS</a:t>
+            </a:r>
+            <a:endParaRPr lang="en-US" sz="1333" dirty="0"/>
+          </a:p>
+        </p:txBody>
+      </p:sp>
+      <p:sp>
+        <p:nvSpPr>
+          <p:cNvPr id="3" name="Text 1"/>
+          <p:cNvSpPr/>
+          <p:nvPr/>
+        </p:nvSpPr>
+        <p:spPr>
+          <a:xfrm>
+            <a:off x="643174" y="846534"/>
+            <a:ext cx="11120657" cy="487561"/>
+          </a:xfrm>
+          <a:prstGeom prst="rect">
+            <a:avLst/>
+          </a:prstGeom>
+          <a:noFill/>
+          <a:ln/>
+        </p:spPr>
+        <p:txBody>
+          <a:bodyPr wrap="square" lIns="0" tIns="0" rIns="0" bIns="0" rtlCol="0" anchor="t"/>
+          <a:lstStyle/>
+          <a:p>
+            <a:pPr algn="l" indent="0" marL="0">
+              <a:lnSpc>
+                <a:spcPts val="3840"/>
+              </a:lnSpc>
+              <a:spcAft>
+                <a:spcPts val="1067"/>
+              </a:spcAft>
+              <a:buNone/>
+            </a:pPr>
+            <a:r>
+              <a:rPr lang="en-US" sz="3200" b="1" dirty="0">
+                <a:solidFill>
+                  <a:srgbClr val="0A0A0A"/>
+                </a:solidFill>
+                <a:latin typeface="Arimo" pitchFamily="34" charset="0"/>
+                <a:ea typeface="Arimo" pitchFamily="34" charset="-122"/>
+                <a:cs typeface="Arimo" pitchFamily="34" charset="-120"/>
+              </a:rPr>
+              <a:t>What we need to decide</a:t>
+            </a:r>
+            <a:endParaRPr lang="en-US" sz="3200" dirty="0"/>
+          </a:p>
+        </p:txBody>
+      </p:sp>
+      <p:sp>
+        <p:nvSpPr>
+          <p:cNvPr id="4" name="Text 2"/>
+          <p:cNvSpPr/>
+          <p:nvPr/>
+        </p:nvSpPr>
+        <p:spPr>
+          <a:xfrm>
+            <a:off x="643174" y="1469430"/>
+            <a:ext cx="11120657" cy="331986"/>
+          </a:xfrm>
+          <a:prstGeom prst="rect">
+            <a:avLst/>
+          </a:prstGeom>
+          <a:noFill/>
+          <a:ln/>
+        </p:spPr>
+        <p:txBody>
+          <a:bodyPr wrap="square" lIns="0" tIns="0" rIns="0" bIns="0" rtlCol="0" anchor="t"/>
+          <a:lstStyle/>
+          <a:p>
+            <a:pPr algn="l" indent="0" marL="0">
+              <a:lnSpc>
+                <a:spcPts val="2613"/>
+              </a:lnSpc>
+              <a:spcAft>
+                <a:spcPts val="1600"/>
+              </a:spcAft>
+              <a:buNone/>
+            </a:pPr>
+            <a:r>
+              <a:rPr lang="en-US" sz="1866" dirty="0">
+                <a:solidFill>
+                  <a:srgbClr val="3D3D3D"/>
+                </a:solidFill>
+                <a:latin typeface="Arimo" pitchFamily="34" charset="0"/>
+                <a:ea typeface="Arimo" pitchFamily="34" charset="-122"/>
+                <a:cs typeface="Arimo" pitchFamily="34" charset="-120"/>
+              </a:rPr>
+              <a:t>The rule is short. Holding to it is not. These are the parts still open.</a:t>
+            </a:r>
+            <a:endParaRPr lang="en-US" sz="1866" dirty="0"/>
+          </a:p>
+        </p:txBody>
+      </p:sp>
+      <p:sp>
+        <p:nvSpPr>
+          <p:cNvPr id="5" name="Text 3"/>
+          <p:cNvSpPr/>
+          <p:nvPr/>
+        </p:nvSpPr>
+        <p:spPr>
+          <a:xfrm>
+            <a:off x="643174" y="2004616"/>
+            <a:ext cx="10902605" cy="50800"/>
+          </a:xfrm>
+          <a:prstGeom prst="rect">
+            <a:avLst/>
+          </a:prstGeom>
+          <a:solidFill>
+            <a:srgbClr val="0A0A0A"/>
+          </a:solidFill>
+          <a:ln/>
+        </p:spPr>
+        <p:txBody>
+          <a:bodyPr wrap="square" rtlCol="0" anchor="ctr"/>
+          <a:lstStyle/>
+          <a:p>
+            <a:pPr indent="0" marL="0">
+              <a:buNone/>
+            </a:pPr>
+            <a:endParaRPr lang="en-US" dirty="0"/>
+          </a:p>
+        </p:txBody>
+      </p:sp>
+      <p:sp>
+        <p:nvSpPr>
+          <p:cNvPr id="6" name="Text 4"/>
+          <p:cNvSpPr/>
+          <p:nvPr/>
+        </p:nvSpPr>
+        <p:spPr>
+          <a:xfrm>
+            <a:off x="643174" y="2292350"/>
+            <a:ext cx="10902605" cy="1232297"/>
+          </a:xfrm>
+          <a:prstGeom prst="rect">
+            <a:avLst/>
+          </a:prstGeom>
+          <a:solidFill>
+            <a:srgbClr val="0A0A0A"/>
+          </a:solidFill>
+          <a:ln/>
+        </p:spPr>
+        <p:txBody>
+          <a:bodyPr wrap="square" rtlCol="0" anchor="ctr"/>
+          <a:lstStyle/>
+          <a:p>
+            <a:pPr indent="0" marL="0">
+              <a:buNone/>
+            </a:pPr>
+            <a:endParaRPr lang="en-US" dirty="0"/>
+          </a:p>
+        </p:txBody>
+      </p:sp>
+      <p:sp>
+        <p:nvSpPr>
+          <p:cNvPr id="7" name="Text 5"/>
+          <p:cNvSpPr/>
+          <p:nvPr/>
+        </p:nvSpPr>
+        <p:spPr>
+          <a:xfrm>
+            <a:off x="913973" y="2529284"/>
+            <a:ext cx="10568226" cy="758428"/>
+          </a:xfrm>
+          <a:prstGeom prst="rect">
+            <a:avLst/>
+          </a:prstGeom>
+          <a:noFill/>
+          <a:ln/>
+        </p:spPr>
+        <p:txBody>
+          <a:bodyPr wrap="square" lIns="0" tIns="0" rIns="0" bIns="0" rtlCol="0" anchor="t"/>
+          <a:lstStyle/>
+          <a:p>
+            <a:pPr algn="l" indent="0" marL="0">
+              <a:lnSpc>
+                <a:spcPts val="2986"/>
+              </a:lnSpc>
+              <a:buNone/>
+            </a:pPr>
+            <a:r>
+              <a:rPr lang="en-US" sz="2133" b="1" dirty="0">
+                <a:solidFill>
+                  <a:srgbClr val="FFFFFF"/>
+                </a:solidFill>
+                <a:latin typeface="Arimo" pitchFamily="34" charset="0"/>
+                <a:ea typeface="Arimo" pitchFamily="34" charset="-122"/>
+                <a:cs typeface="Arimo" pitchFamily="34" charset="-120"/>
+              </a:rPr>
+              <a:t>If it can wait, it is a ticket. If no one is needed, it is a script. If nobody is looking, it is a dashboard. What is left is a page.</a:t>
+            </a:r>
+            <a:endParaRPr lang="en-US" sz="2133" dirty="0"/>
+          </a:p>
+        </p:txBody>
+      </p:sp>
+      <p:sp>
+        <p:nvSpPr>
+          <p:cNvPr id="8" name="Shape 6"/>
+          <p:cNvSpPr/>
+          <p:nvPr/>
+        </p:nvSpPr>
+        <p:spPr>
+          <a:xfrm>
+            <a:off x="643174" y="3774281"/>
+            <a:ext cx="10902605" cy="0"/>
+          </a:xfrm>
+          <a:prstGeom prst="line">
+            <a:avLst/>
+          </a:prstGeom>
+          <a:noFill/>
+          <a:ln w="25397">
+            <a:solidFill>
+              <a:srgbClr val="0A0A0A"/>
+            </a:solidFill>
+            <a:prstDash val="solid"/>
+          </a:ln>
+        </p:spPr>
+      </p:sp>
+      <p:sp>
+        <p:nvSpPr>
+          <p:cNvPr id="9" name="Text 7"/>
+          <p:cNvSpPr/>
+          <p:nvPr/>
+        </p:nvSpPr>
+        <p:spPr>
+          <a:xfrm>
+            <a:off x="643174" y="3913783"/>
+            <a:ext cx="372374" cy="372467"/>
+          </a:xfrm>
+          <a:prstGeom prst="rect">
+            <a:avLst/>
+          </a:prstGeom>
+          <a:solidFill>
+            <a:srgbClr val="0A0A0A"/>
+          </a:solidFill>
+          <a:ln/>
+        </p:spPr>
+        <p:txBody>
+          <a:bodyPr wrap="square" rtlCol="0" anchor="ctr"/>
+          <a:lstStyle/>
+          <a:p>
+            <a:pPr indent="0" marL="0">
+              <a:buNone/>
+            </a:pPr>
+            <a:endParaRPr lang="en-US" dirty="0"/>
+          </a:p>
+        </p:txBody>
+      </p:sp>
+      <p:sp>
+        <p:nvSpPr>
+          <p:cNvPr id="10" name="Text 8"/>
+          <p:cNvSpPr/>
+          <p:nvPr/>
+        </p:nvSpPr>
+        <p:spPr>
+          <a:xfrm>
+            <a:off x="772126" y="3957836"/>
+            <a:ext cx="116557" cy="284361"/>
+          </a:xfrm>
+          <a:prstGeom prst="rect">
+            <a:avLst/>
+          </a:prstGeom>
+          <a:noFill/>
+          <a:ln/>
+        </p:spPr>
+        <p:txBody>
+          <a:bodyPr wrap="square" lIns="0" tIns="0" rIns="0" bIns="0" rtlCol="0" anchor="t"/>
+          <a:lstStyle/>
+          <a:p>
+            <a:pPr algn="l" indent="0" marL="0">
+              <a:lnSpc>
+                <a:spcPts val="2240"/>
+              </a:lnSpc>
+              <a:buNone/>
+            </a:pPr>
+            <a:r>
+              <a:rPr lang="en-US" sz="1600" b="1" dirty="0">
+                <a:solidFill>
+                  <a:srgbClr val="FFFFFF"/>
+                </a:solidFill>
+                <a:latin typeface="Arimo" pitchFamily="34" charset="0"/>
+                <a:ea typeface="Arimo" pitchFamily="34" charset="-122"/>
+                <a:cs typeface="Arimo" pitchFamily="34" charset="-120"/>
+              </a:rPr>
+              <a:t>1</a:t>
+            </a:r>
+            <a:endParaRPr lang="en-US" sz="1600" dirty="0"/>
+          </a:p>
+        </p:txBody>
+      </p:sp>
+      <p:sp>
+        <p:nvSpPr>
+          <p:cNvPr id="11" name="Text 9"/>
+          <p:cNvSpPr/>
+          <p:nvPr/>
+        </p:nvSpPr>
+        <p:spPr>
+          <a:xfrm>
+            <a:off x="1218697" y="3928070"/>
+            <a:ext cx="6786199" cy="343694"/>
+          </a:xfrm>
+          <a:prstGeom prst="rect">
+            <a:avLst/>
+          </a:prstGeom>
+          <a:noFill/>
+          <a:ln/>
+        </p:spPr>
+        <p:txBody>
+          <a:bodyPr wrap="square" lIns="0" tIns="0" rIns="0" bIns="0" rtlCol="0" anchor="t"/>
+          <a:lstStyle/>
+          <a:p>
+            <a:pPr algn="l" indent="0" marL="0">
+              <a:lnSpc>
+                <a:spcPts val="2706"/>
+              </a:lnSpc>
+              <a:buNone/>
+            </a:pPr>
+            <a:r>
+              <a:rPr lang="en-US" sz="1866" dirty="0">
+                <a:solidFill>
+                  <a:srgbClr val="0A0A0A"/>
+                </a:solidFill>
+                <a:latin typeface="Arimo" pitchFamily="34" charset="0"/>
+                <a:ea typeface="Arimo" pitchFamily="34" charset="-122"/>
+                <a:cs typeface="Arimo" pitchFamily="34" charset="-120"/>
+              </a:rPr>
+              <a:t>Who may delete an alert, and what do they have to show to do it?</a:t>
+            </a:r>
+            <a:endParaRPr lang="en-US" sz="1866" dirty="0"/>
+          </a:p>
+        </p:txBody>
+      </p:sp>
+      <p:sp>
+        <p:nvSpPr>
+          <p:cNvPr id="12" name="Shape 10"/>
+          <p:cNvSpPr/>
+          <p:nvPr/>
+        </p:nvSpPr>
+        <p:spPr>
+          <a:xfrm>
+            <a:off x="643174" y="4425553"/>
+            <a:ext cx="10902605" cy="0"/>
+          </a:xfrm>
+          <a:prstGeom prst="line">
+            <a:avLst/>
+          </a:prstGeom>
+          <a:noFill/>
+          <a:ln w="25397">
+            <a:solidFill>
+              <a:srgbClr val="0A0A0A"/>
+            </a:solidFill>
+            <a:prstDash val="solid"/>
+          </a:ln>
+        </p:spPr>
+      </p:sp>
+      <p:sp>
+        <p:nvSpPr>
+          <p:cNvPr id="13" name="Text 11"/>
+          <p:cNvSpPr/>
+          <p:nvPr/>
+        </p:nvSpPr>
+        <p:spPr>
+          <a:xfrm>
+            <a:off x="643174" y="4565055"/>
+            <a:ext cx="372374" cy="372467"/>
+          </a:xfrm>
+          <a:prstGeom prst="rect">
+            <a:avLst/>
+          </a:prstGeom>
+          <a:solidFill>
+            <a:srgbClr val="0A0A0A"/>
+          </a:solidFill>
+          <a:ln/>
+        </p:spPr>
+        <p:txBody>
+          <a:bodyPr wrap="square" rtlCol="0" anchor="ctr"/>
+          <a:lstStyle/>
+          <a:p>
+            <a:pPr indent="0" marL="0">
+              <a:buNone/>
+            </a:pPr>
+            <a:endParaRPr lang="en-US" dirty="0"/>
+          </a:p>
+        </p:txBody>
+      </p:sp>
+      <p:sp>
+        <p:nvSpPr>
+          <p:cNvPr id="14" name="Text 12"/>
+          <p:cNvSpPr/>
+          <p:nvPr/>
+        </p:nvSpPr>
+        <p:spPr>
+          <a:xfrm>
+            <a:off x="772126" y="4609108"/>
+            <a:ext cx="116557" cy="284361"/>
+          </a:xfrm>
+          <a:prstGeom prst="rect">
+            <a:avLst/>
+          </a:prstGeom>
+          <a:noFill/>
+          <a:ln/>
+        </p:spPr>
+        <p:txBody>
+          <a:bodyPr wrap="square" lIns="0" tIns="0" rIns="0" bIns="0" rtlCol="0" anchor="t"/>
+          <a:lstStyle/>
+          <a:p>
+            <a:pPr algn="l" indent="0" marL="0">
+              <a:lnSpc>
+                <a:spcPts val="2240"/>
+              </a:lnSpc>
+              <a:buNone/>
+            </a:pPr>
+            <a:r>
+              <a:rPr lang="en-US" sz="1600" b="1" dirty="0">
+                <a:solidFill>
+                  <a:srgbClr val="FFFFFF"/>
+                </a:solidFill>
+                <a:latin typeface="Arimo" pitchFamily="34" charset="0"/>
+                <a:ea typeface="Arimo" pitchFamily="34" charset="-122"/>
+                <a:cs typeface="Arimo" pitchFamily="34" charset="-120"/>
+              </a:rPr>
+              <a:t>2</a:t>
+            </a:r>
+            <a:endParaRPr lang="en-US" sz="1600" dirty="0"/>
+          </a:p>
+        </p:txBody>
+      </p:sp>
+      <p:sp>
+        <p:nvSpPr>
+          <p:cNvPr id="15" name="Text 13"/>
+          <p:cNvSpPr/>
+          <p:nvPr/>
+        </p:nvSpPr>
+        <p:spPr>
+          <a:xfrm>
+            <a:off x="1218697" y="4579342"/>
+            <a:ext cx="7032263" cy="343694"/>
+          </a:xfrm>
+          <a:prstGeom prst="rect">
+            <a:avLst/>
+          </a:prstGeom>
+          <a:noFill/>
+          <a:ln/>
+        </p:spPr>
+        <p:txBody>
+          <a:bodyPr wrap="square" lIns="0" tIns="0" rIns="0" bIns="0" rtlCol="0" anchor="t"/>
+          <a:lstStyle/>
+          <a:p>
+            <a:pPr algn="l" indent="0" marL="0">
+              <a:lnSpc>
+                <a:spcPts val="2706"/>
+              </a:lnSpc>
+              <a:buNone/>
+            </a:pPr>
+            <a:r>
+              <a:rPr lang="en-US" sz="1866" dirty="0">
+                <a:solidFill>
+                  <a:srgbClr val="0A0A0A"/>
+                </a:solidFill>
+                <a:latin typeface="Arimo" pitchFamily="34" charset="0"/>
+                <a:ea typeface="Arimo" pitchFamily="34" charset="-122"/>
+                <a:cs typeface="Arimo" pitchFamily="34" charset="-120"/>
+              </a:rPr>
+              <a:t>How many pages in one shift is too many, and who makes that call?</a:t>
+            </a:r>
+            <a:endParaRPr lang="en-US" sz="1866" dirty="0"/>
+          </a:p>
+        </p:txBody>
+      </p:sp>
+      <p:sp>
+        <p:nvSpPr>
+          <p:cNvPr id="16" name="Shape 14"/>
+          <p:cNvSpPr/>
+          <p:nvPr/>
+        </p:nvSpPr>
+        <p:spPr>
+          <a:xfrm>
+            <a:off x="643174" y="5076825"/>
+            <a:ext cx="10902605" cy="0"/>
+          </a:xfrm>
+          <a:prstGeom prst="line">
+            <a:avLst/>
+          </a:prstGeom>
+          <a:noFill/>
+          <a:ln w="25397">
+            <a:solidFill>
+              <a:srgbClr val="0A0A0A"/>
+            </a:solidFill>
+            <a:prstDash val="solid"/>
+          </a:ln>
+        </p:spPr>
+      </p:sp>
+      <p:sp>
+        <p:nvSpPr>
+          <p:cNvPr id="17" name="Text 15"/>
+          <p:cNvSpPr/>
+          <p:nvPr/>
+        </p:nvSpPr>
+        <p:spPr>
+          <a:xfrm>
+            <a:off x="643174" y="5216327"/>
+            <a:ext cx="372374" cy="372467"/>
+          </a:xfrm>
+          <a:prstGeom prst="rect">
+            <a:avLst/>
+          </a:prstGeom>
+          <a:solidFill>
+            <a:srgbClr val="0A0A0A"/>
+          </a:solidFill>
+          <a:ln/>
+        </p:spPr>
+        <p:txBody>
+          <a:bodyPr wrap="square" rtlCol="0" anchor="ctr"/>
+          <a:lstStyle/>
+          <a:p>
+            <a:pPr indent="0" marL="0">
+              <a:buNone/>
+            </a:pPr>
+            <a:endParaRPr lang="en-US" dirty="0"/>
+          </a:p>
+        </p:txBody>
+      </p:sp>
+      <p:sp>
+        <p:nvSpPr>
+          <p:cNvPr id="18" name="Text 16"/>
+          <p:cNvSpPr/>
+          <p:nvPr/>
+        </p:nvSpPr>
+        <p:spPr>
+          <a:xfrm>
+            <a:off x="772126" y="5260380"/>
+            <a:ext cx="116557" cy="284361"/>
+          </a:xfrm>
+          <a:prstGeom prst="rect">
+            <a:avLst/>
+          </a:prstGeom>
+          <a:noFill/>
+          <a:ln/>
+        </p:spPr>
+        <p:txBody>
+          <a:bodyPr wrap="square" lIns="0" tIns="0" rIns="0" bIns="0" rtlCol="0" anchor="t"/>
+          <a:lstStyle/>
+          <a:p>
+            <a:pPr algn="l" indent="0" marL="0">
+              <a:lnSpc>
+                <a:spcPts val="2240"/>
+              </a:lnSpc>
+              <a:buNone/>
+            </a:pPr>
+            <a:r>
+              <a:rPr lang="en-US" sz="1600" b="1" dirty="0">
+                <a:solidFill>
+                  <a:srgbClr val="FFFFFF"/>
+                </a:solidFill>
+                <a:latin typeface="Arimo" pitchFamily="34" charset="0"/>
+                <a:ea typeface="Arimo" pitchFamily="34" charset="-122"/>
+                <a:cs typeface="Arimo" pitchFamily="34" charset="-120"/>
+              </a:rPr>
+              <a:t>3</a:t>
+            </a:r>
+            <a:endParaRPr lang="en-US" sz="1600" dirty="0"/>
+          </a:p>
+        </p:txBody>
+      </p:sp>
+      <p:sp>
+        <p:nvSpPr>
+          <p:cNvPr id="19" name="Text 17"/>
+          <p:cNvSpPr/>
+          <p:nvPr/>
+        </p:nvSpPr>
+        <p:spPr>
+          <a:xfrm>
+            <a:off x="1218697" y="5230614"/>
+            <a:ext cx="6281119" cy="343694"/>
+          </a:xfrm>
+          <a:prstGeom prst="rect">
+            <a:avLst/>
+          </a:prstGeom>
+          <a:noFill/>
+          <a:ln/>
+        </p:spPr>
+        <p:txBody>
+          <a:bodyPr wrap="square" lIns="0" tIns="0" rIns="0" bIns="0" rtlCol="0" anchor="t"/>
+          <a:lstStyle/>
+          <a:p>
+            <a:pPr algn="l" indent="0" marL="0">
+              <a:lnSpc>
+                <a:spcPts val="2706"/>
+              </a:lnSpc>
+              <a:buNone/>
+            </a:pPr>
+            <a:r>
+              <a:rPr lang="en-US" sz="1866" dirty="0">
+                <a:solidFill>
+                  <a:srgbClr val="0A0A0A"/>
+                </a:solidFill>
+                <a:latin typeface="Arimo" pitchFamily="34" charset="0"/>
+                <a:ea typeface="Arimo" pitchFamily="34" charset="-122"/>
+                <a:cs typeface="Arimo" pitchFamily="34" charset="-120"/>
+              </a:rPr>
+              <a:t>Which alerts do we fix at the source before the next rotation?</a:t>
+            </a:r>
+            <a:endParaRPr lang="en-US" sz="1866" dirty="0"/>
+          </a:p>
+        </p:txBody>
+      </p:sp>
+      <p:sp>
+        <p:nvSpPr>
+          <p:cNvPr id="20" name="Text 18"/>
+          <p:cNvSpPr/>
+          <p:nvPr/>
+        </p:nvSpPr>
+        <p:spPr>
+          <a:xfrm>
+            <a:off x="643174" y="5884664"/>
+            <a:ext cx="10902605" cy="25400"/>
+          </a:xfrm>
+          <a:prstGeom prst="rect">
+            <a:avLst/>
+          </a:prstGeom>
+          <a:solidFill>
+            <a:srgbClr val="0A0A0A"/>
+          </a:solidFill>
+          <a:ln/>
+        </p:spPr>
+        <p:txBody>
+          <a:bodyPr wrap="square" rtlCol="0" anchor="ctr"/>
+          <a:lstStyle/>
+          <a:p>
+            <a:pPr indent="0" marL="0">
+              <a:buNone/>
+            </a:pPr>
+            <a:endParaRPr lang="en-US" dirty="0"/>
+          </a:p>
+        </p:txBody>
+      </p:sp>
+      <p:sp>
+        <p:nvSpPr>
+          <p:cNvPr id="21" name="Text 19"/>
+          <p:cNvSpPr/>
+          <p:nvPr/>
+        </p:nvSpPr>
+        <p:spPr>
+          <a:xfrm>
+            <a:off x="643174" y="5910064"/>
+            <a:ext cx="11120657" cy="304602"/>
+          </a:xfrm>
+          <a:prstGeom prst="rect">
+            <a:avLst/>
+          </a:prstGeom>
+          <a:noFill/>
+          <a:ln/>
+        </p:spPr>
+        <p:txBody>
+          <a:bodyPr wrap="square" lIns="0" tIns="67725" rIns="0" bIns="0" rtlCol="0" anchor="t"/>
+          <a:lstStyle/>
+          <a:p>
+            <a:pPr algn="l" indent="0" marL="0">
+              <a:lnSpc>
+                <a:spcPts val="1866"/>
+              </a:lnSpc>
+              <a:buNone/>
+            </a:pPr>
+            <a:r>
+              <a:rPr lang="en-US" sz="1333" dirty="0">
+                <a:solidFill>
+                  <a:srgbClr val="767676"/>
+                </a:solidFill>
+                <a:latin typeface="Arimo" pitchFamily="34" charset="0"/>
+                <a:ea typeface="Arimo" pitchFamily="34" charset="-122"/>
+                <a:cs typeface="Arimo" pitchFamily="34" charset="-120"/>
+              </a:rPr>
+              <a:t>PRESENTER · TEAM · ALERT DESIGN · SHEET 05/05 · NO CHART, NO EXTERNAL DATA</a:t>
+            </a:r>
+            <a:endParaRPr lang="en-US" sz="1333" dirty="0"/>
+          </a:p>
+        </p:txBody>
+      </p:sp>
     </p:spTree>
   </p:cSld>
   <p:clrMapOvr>

--- a/decks/alert-design/alert-design.pptx
+++ b/decks/alert-design/alert-design.pptx
@@ -1249,7 +1249,7 @@
           <a:ln/>
         </p:spPr>
         <p:txBody>
-          <a:bodyPr wrap="square" lIns="0" tIns="0" rIns="0" bIns="0" rtlCol="0" anchor="t"/>
+          <a:bodyPr wrap="none" lIns="0" tIns="0" rIns="0" bIns="0" rtlCol="0" anchor="t"/>
           <a:lstStyle/>
           <a:p>
             <a:pPr algn="l" indent="0" marL="0">
@@ -1324,7 +1324,9 @@
           <a:ln/>
         </p:spPr>
         <p:txBody>
-          <a:bodyPr wrap="square" lIns="0" tIns="0" rIns="0" bIns="0" rtlCol="0" anchor="t"/>
+          <a:bodyPr wrap="square" lIns="0" tIns="0" rIns="0" bIns="0" rtlCol="0" anchor="t">
+            <a:normAutofit/>
+          </a:bodyPr>
           <a:lstStyle/>
           <a:p>
             <a:pPr algn="l" indent="0" marL="0">
@@ -1422,7 +1424,9 @@
           <a:ln/>
         </p:spPr>
         <p:txBody>
-          <a:bodyPr wrap="square" lIns="0" tIns="0" rIns="0" bIns="0" rtlCol="0" anchor="t"/>
+          <a:bodyPr wrap="square" lIns="0" tIns="0" rIns="0" bIns="0" rtlCol="0" anchor="t">
+            <a:normAutofit/>
+          </a:bodyPr>
           <a:lstStyle/>
           <a:p>
             <a:pPr algn="l" indent="0" marL="0">
@@ -1568,7 +1572,7 @@
           <a:ln/>
         </p:spPr>
         <p:txBody>
-          <a:bodyPr wrap="square" lIns="0" tIns="0" rIns="0" bIns="0" rtlCol="0" anchor="t"/>
+          <a:bodyPr wrap="none" lIns="0" tIns="0" rIns="0" bIns="0" rtlCol="0" anchor="t"/>
           <a:lstStyle/>
           <a:p>
             <a:pPr algn="l" indent="0" marL="0">
@@ -1613,7 +1617,7 @@
           <a:ln/>
         </p:spPr>
         <p:txBody>
-          <a:bodyPr wrap="square" lIns="0" tIns="0" rIns="0" bIns="0" rtlCol="0" anchor="t"/>
+          <a:bodyPr wrap="none" lIns="0" tIns="0" rIns="0" bIns="0" rtlCol="0" anchor="t"/>
           <a:lstStyle/>
           <a:p>
             <a:pPr algn="l" indent="0" marL="0">
@@ -1658,7 +1662,7 @@
           <a:ln/>
         </p:spPr>
         <p:txBody>
-          <a:bodyPr wrap="square" lIns="0" tIns="0" rIns="0" bIns="0" rtlCol="0" anchor="t"/>
+          <a:bodyPr wrap="none" lIns="0" tIns="0" rIns="0" bIns="0" rtlCol="0" anchor="t"/>
           <a:lstStyle/>
           <a:p>
             <a:pPr algn="l" indent="0" marL="0">
@@ -1733,7 +1737,7 @@
           <a:ln/>
         </p:spPr>
         <p:txBody>
-          <a:bodyPr wrap="square" lIns="0" tIns="0" rIns="0" bIns="0" rtlCol="0" anchor="t"/>
+          <a:bodyPr wrap="none" lIns="0" tIns="0" rIns="0" bIns="0" rtlCol="0" anchor="t"/>
           <a:lstStyle/>
           <a:p>
             <a:pPr algn="r" indent="0" marL="0">
@@ -1779,6 +1783,10 @@
             <a:prstDash val="solid"/>
           </a:ln>
         </p:spPr>
+        <p:txBody>
+          <a:bodyPr/>
+          <a:p/>
+        </p:txBody>
       </p:sp>
       <p:sp>
         <p:nvSpPr>
@@ -1798,7 +1806,9 @@
           <a:ln/>
         </p:spPr>
         <p:txBody>
-          <a:bodyPr wrap="square" lIns="0" tIns="0" rIns="0" bIns="0" rtlCol="0" anchor="t"/>
+          <a:bodyPr wrap="square" lIns="0" tIns="0" rIns="0" bIns="0" rtlCol="0" anchor="t">
+            <a:normAutofit/>
+          </a:bodyPr>
           <a:lstStyle/>
           <a:p>
             <a:pPr algn="r" indent="0" marL="0">
@@ -1844,6 +1854,10 @@
             <a:prstDash val="solid"/>
           </a:ln>
         </p:spPr>
+        <p:txBody>
+          <a:bodyPr/>
+          <a:p/>
+        </p:txBody>
       </p:sp>
       <p:sp>
         <p:nvSpPr>
@@ -1863,7 +1877,7 @@
           <a:ln/>
         </p:spPr>
         <p:txBody>
-          <a:bodyPr wrap="square" lIns="0" tIns="0" rIns="0" bIns="0" rtlCol="0" anchor="t"/>
+          <a:bodyPr wrap="none" lIns="0" tIns="0" rIns="0" bIns="0" rtlCol="0" anchor="t"/>
           <a:lstStyle/>
           <a:p>
             <a:pPr algn="l" indent="0" marL="0">
@@ -1905,7 +1919,9 @@
           <a:ln/>
         </p:spPr>
         <p:txBody>
-          <a:bodyPr wrap="square" lIns="0" tIns="0" rIns="0" bIns="0" rtlCol="0" anchor="t"/>
+          <a:bodyPr wrap="square" lIns="0" tIns="0" rIns="0" bIns="0" rtlCol="0" anchor="t">
+            <a:normAutofit/>
+          </a:bodyPr>
           <a:lstStyle/>
           <a:p>
             <a:pPr algn="l" indent="0" marL="0">
@@ -1951,6 +1967,10 @@
             <a:prstDash val="solid"/>
           </a:ln>
         </p:spPr>
+        <p:txBody>
+          <a:bodyPr/>
+          <a:p/>
+        </p:txBody>
       </p:sp>
       <p:sp>
         <p:nvSpPr>
@@ -1970,7 +1990,9 @@
           <a:ln/>
         </p:spPr>
         <p:txBody>
-          <a:bodyPr wrap="square" lIns="0" tIns="0" rIns="0" bIns="0" rtlCol="0" anchor="t"/>
+          <a:bodyPr wrap="square" lIns="0" tIns="0" rIns="0" bIns="0" rtlCol="0" anchor="t">
+            <a:normAutofit/>
+          </a:bodyPr>
           <a:lstStyle/>
           <a:p>
             <a:pPr algn="l" indent="0" marL="0">
@@ -2046,6 +2068,10 @@
             <a:prstDash val="solid"/>
           </a:ln>
         </p:spPr>
+        <p:txBody>
+          <a:bodyPr/>
+          <a:p/>
+        </p:txBody>
       </p:sp>
       <p:sp>
         <p:nvSpPr>
@@ -2065,7 +2091,7 @@
           <a:ln/>
         </p:spPr>
         <p:txBody>
-          <a:bodyPr wrap="square" lIns="0" tIns="0" rIns="0" bIns="0" rtlCol="0" anchor="t"/>
+          <a:bodyPr wrap="none" lIns="0" tIns="0" rIns="0" bIns="0" rtlCol="0" anchor="t"/>
           <a:lstStyle/>
           <a:p>
             <a:pPr algn="l" indent="0" marL="0">
@@ -2107,7 +2133,9 @@
           <a:ln/>
         </p:spPr>
         <p:txBody>
-          <a:bodyPr wrap="square" lIns="0" tIns="0" rIns="0" bIns="0" rtlCol="0" anchor="t"/>
+          <a:bodyPr wrap="square" lIns="0" tIns="0" rIns="0" bIns="0" rtlCol="0" anchor="t">
+            <a:normAutofit/>
+          </a:bodyPr>
           <a:lstStyle/>
           <a:p>
             <a:pPr algn="l" indent="0" marL="0">
@@ -2153,6 +2181,10 @@
             <a:prstDash val="solid"/>
           </a:ln>
         </p:spPr>
+        <p:txBody>
+          <a:bodyPr/>
+          <a:p/>
+        </p:txBody>
       </p:sp>
       <p:sp>
         <p:nvSpPr>
@@ -2172,7 +2204,9 @@
           <a:ln/>
         </p:spPr>
         <p:txBody>
-          <a:bodyPr wrap="square" lIns="0" tIns="0" rIns="0" bIns="0" rtlCol="0" anchor="t"/>
+          <a:bodyPr wrap="square" lIns="0" tIns="0" rIns="0" bIns="0" rtlCol="0" anchor="t">
+            <a:normAutofit/>
+          </a:bodyPr>
           <a:lstStyle/>
           <a:p>
             <a:pPr algn="l" indent="0" marL="0">
@@ -2248,6 +2282,10 @@
             <a:prstDash val="solid"/>
           </a:ln>
         </p:spPr>
+        <p:txBody>
+          <a:bodyPr/>
+          <a:p/>
+        </p:txBody>
       </p:sp>
       <p:sp>
         <p:nvSpPr>
@@ -2267,7 +2305,7 @@
           <a:ln/>
         </p:spPr>
         <p:txBody>
-          <a:bodyPr wrap="square" lIns="0" tIns="0" rIns="0" bIns="0" rtlCol="0" anchor="t"/>
+          <a:bodyPr wrap="none" lIns="0" tIns="0" rIns="0" bIns="0" rtlCol="0" anchor="t"/>
           <a:lstStyle/>
           <a:p>
             <a:pPr algn="l" indent="0" marL="0">
@@ -2309,7 +2347,9 @@
           <a:ln/>
         </p:spPr>
         <p:txBody>
-          <a:bodyPr wrap="square" lIns="0" tIns="0" rIns="0" bIns="0" rtlCol="0" anchor="t"/>
+          <a:bodyPr wrap="square" lIns="0" tIns="0" rIns="0" bIns="0" rtlCol="0" anchor="t">
+            <a:normAutofit/>
+          </a:bodyPr>
           <a:lstStyle/>
           <a:p>
             <a:pPr algn="l" indent="0" marL="0">
@@ -2355,6 +2395,10 @@
             <a:prstDash val="solid"/>
           </a:ln>
         </p:spPr>
+        <p:txBody>
+          <a:bodyPr/>
+          <a:p/>
+        </p:txBody>
       </p:sp>
       <p:sp>
         <p:nvSpPr>
@@ -2374,7 +2418,9 @@
           <a:ln/>
         </p:spPr>
         <p:txBody>
-          <a:bodyPr wrap="square" lIns="0" tIns="0" rIns="0" bIns="0" rtlCol="0" anchor="t"/>
+          <a:bodyPr wrap="square" lIns="0" tIns="0" rIns="0" bIns="0" rtlCol="0" anchor="t">
+            <a:normAutofit/>
+          </a:bodyPr>
           <a:lstStyle/>
           <a:p>
             <a:pPr algn="l" indent="0" marL="0">
@@ -2520,7 +2566,7 @@
           <a:ln/>
         </p:spPr>
         <p:txBody>
-          <a:bodyPr wrap="square" lIns="0" tIns="0" rIns="0" bIns="0" rtlCol="0" anchor="t"/>
+          <a:bodyPr wrap="none" lIns="0" tIns="0" rIns="0" bIns="0" rtlCol="0" anchor="t"/>
           <a:lstStyle/>
           <a:p>
             <a:pPr algn="l" indent="0" marL="0">
@@ -2565,7 +2611,7 @@
           <a:ln/>
         </p:spPr>
         <p:txBody>
-          <a:bodyPr wrap="square" lIns="0" tIns="0" rIns="0" bIns="0" rtlCol="0" anchor="t"/>
+          <a:bodyPr wrap="none" lIns="0" tIns="0" rIns="0" bIns="0" rtlCol="0" anchor="t"/>
           <a:lstStyle/>
           <a:p>
             <a:pPr algn="l" indent="0" marL="0">
@@ -2610,7 +2656,7 @@
           <a:ln/>
         </p:spPr>
         <p:txBody>
-          <a:bodyPr wrap="square" lIns="0" tIns="0" rIns="0" bIns="0" rtlCol="0" anchor="t"/>
+          <a:bodyPr wrap="none" lIns="0" tIns="0" rIns="0" bIns="0" rtlCol="0" anchor="t"/>
           <a:lstStyle/>
           <a:p>
             <a:pPr algn="l" indent="0" marL="0">
@@ -2715,7 +2761,7 @@
           <a:ln/>
         </p:spPr>
         <p:txBody>
-          <a:bodyPr wrap="square" lIns="0" tIns="0" rIns="0" bIns="0" rtlCol="0" anchor="t"/>
+          <a:bodyPr wrap="none" lIns="0" tIns="0" rIns="0" bIns="0" rtlCol="0" anchor="t"/>
           <a:lstStyle/>
           <a:p>
             <a:pPr algn="l" indent="0" marL="0">
@@ -2757,7 +2803,7 @@
           <a:ln/>
         </p:spPr>
         <p:txBody>
-          <a:bodyPr wrap="square" lIns="0" tIns="0" rIns="0" bIns="0" rtlCol="0" anchor="t"/>
+          <a:bodyPr wrap="none" lIns="0" tIns="0" rIns="0" bIns="0" rtlCol="0" anchor="t"/>
           <a:lstStyle/>
           <a:p>
             <a:pPr algn="l" indent="0" marL="0">
@@ -2802,7 +2848,9 @@
           <a:ln/>
         </p:spPr>
         <p:txBody>
-          <a:bodyPr wrap="square" lIns="0" tIns="0" rIns="0" bIns="0" rtlCol="0" anchor="t"/>
+          <a:bodyPr wrap="square" lIns="0" tIns="0" rIns="0" bIns="0" rtlCol="0" anchor="t">
+            <a:normAutofit/>
+          </a:bodyPr>
           <a:lstStyle/>
           <a:p>
             <a:pPr algn="l" indent="0" marL="0">
@@ -2877,7 +2925,7 @@
           <a:ln/>
         </p:spPr>
         <p:txBody>
-          <a:bodyPr wrap="square" lIns="0" tIns="0" rIns="0" bIns="0" rtlCol="0" anchor="t"/>
+          <a:bodyPr wrap="none" lIns="0" tIns="0" rIns="0" bIns="0" rtlCol="0" anchor="t"/>
           <a:lstStyle/>
           <a:p>
             <a:pPr algn="l" indent="0" marL="0">
@@ -2979,7 +3027,7 @@
           <a:ln/>
         </p:spPr>
         <p:txBody>
-          <a:bodyPr wrap="square" lIns="0" tIns="0" rIns="0" bIns="0" rtlCol="0" anchor="t"/>
+          <a:bodyPr wrap="none" lIns="0" tIns="0" rIns="0" bIns="0" rtlCol="0" anchor="t"/>
           <a:lstStyle/>
           <a:p>
             <a:pPr algn="l" indent="0" marL="0">
@@ -3021,7 +3069,7 @@
           <a:ln/>
         </p:spPr>
         <p:txBody>
-          <a:bodyPr wrap="square" lIns="0" tIns="0" rIns="0" bIns="0" rtlCol="0" anchor="t"/>
+          <a:bodyPr wrap="none" lIns="0" tIns="0" rIns="0" bIns="0" rtlCol="0" anchor="t"/>
           <a:lstStyle/>
           <a:p>
             <a:pPr algn="l" indent="0" marL="0">
@@ -3066,7 +3114,9 @@
           <a:ln/>
         </p:spPr>
         <p:txBody>
-          <a:bodyPr wrap="square" lIns="0" tIns="0" rIns="0" bIns="0" rtlCol="0" anchor="t"/>
+          <a:bodyPr wrap="square" lIns="0" tIns="0" rIns="0" bIns="0" rtlCol="0" anchor="t">
+            <a:normAutofit/>
+          </a:bodyPr>
           <a:lstStyle/>
           <a:p>
             <a:pPr algn="l" indent="0" marL="0">
@@ -3141,7 +3191,7 @@
           <a:ln/>
         </p:spPr>
         <p:txBody>
-          <a:bodyPr wrap="square" lIns="0" tIns="0" rIns="0" bIns="0" rtlCol="0" anchor="t"/>
+          <a:bodyPr wrap="none" lIns="0" tIns="0" rIns="0" bIns="0" rtlCol="0" anchor="t"/>
           <a:lstStyle/>
           <a:p>
             <a:pPr algn="l" indent="0" marL="0">
@@ -3243,7 +3293,7 @@
           <a:ln/>
         </p:spPr>
         <p:txBody>
-          <a:bodyPr wrap="square" lIns="0" tIns="0" rIns="0" bIns="0" rtlCol="0" anchor="t"/>
+          <a:bodyPr wrap="none" lIns="0" tIns="0" rIns="0" bIns="0" rtlCol="0" anchor="t"/>
           <a:lstStyle/>
           <a:p>
             <a:pPr algn="l" indent="0" marL="0">
@@ -3285,7 +3335,7 @@
           <a:ln/>
         </p:spPr>
         <p:txBody>
-          <a:bodyPr wrap="square" lIns="0" tIns="0" rIns="0" bIns="0" rtlCol="0" anchor="t"/>
+          <a:bodyPr wrap="none" lIns="0" tIns="0" rIns="0" bIns="0" rtlCol="0" anchor="t"/>
           <a:lstStyle/>
           <a:p>
             <a:pPr algn="l" indent="0" marL="0">
@@ -3330,7 +3380,9 @@
           <a:ln/>
         </p:spPr>
         <p:txBody>
-          <a:bodyPr wrap="square" lIns="0" tIns="0" rIns="0" bIns="0" rtlCol="0" anchor="t"/>
+          <a:bodyPr wrap="square" lIns="0" tIns="0" rIns="0" bIns="0" rtlCol="0" anchor="t">
+            <a:normAutofit/>
+          </a:bodyPr>
           <a:lstStyle/>
           <a:p>
             <a:pPr algn="l" indent="0" marL="0">
@@ -3405,7 +3457,7 @@
           <a:ln/>
         </p:spPr>
         <p:txBody>
-          <a:bodyPr wrap="square" lIns="0" tIns="0" rIns="0" bIns="0" rtlCol="0" anchor="t"/>
+          <a:bodyPr wrap="none" lIns="0" tIns="0" rIns="0" bIns="0" rtlCol="0" anchor="t"/>
           <a:lstStyle/>
           <a:p>
             <a:pPr algn="l" indent="0" marL="0">
@@ -3477,7 +3529,7 @@
           <a:ln/>
         </p:spPr>
         <p:txBody>
-          <a:bodyPr wrap="square" lIns="0" tIns="0" rIns="0" bIns="0" rtlCol="0" anchor="t"/>
+          <a:bodyPr wrap="none" lIns="0" tIns="0" rIns="0" bIns="0" rtlCol="0" anchor="t"/>
           <a:lstStyle/>
           <a:p>
             <a:pPr algn="l" indent="0" marL="0">
@@ -3623,7 +3675,7 @@
           <a:ln/>
         </p:spPr>
         <p:txBody>
-          <a:bodyPr wrap="square" lIns="0" tIns="0" rIns="0" bIns="0" rtlCol="0" anchor="t"/>
+          <a:bodyPr wrap="none" lIns="0" tIns="0" rIns="0" bIns="0" rtlCol="0" anchor="t"/>
           <a:lstStyle/>
           <a:p>
             <a:pPr algn="l" indent="0" marL="0">
@@ -3668,7 +3720,7 @@
           <a:ln/>
         </p:spPr>
         <p:txBody>
-          <a:bodyPr wrap="square" lIns="0" tIns="0" rIns="0" bIns="0" rtlCol="0" anchor="t"/>
+          <a:bodyPr wrap="none" lIns="0" tIns="0" rIns="0" bIns="0" rtlCol="0" anchor="t"/>
           <a:lstStyle/>
           <a:p>
             <a:pPr algn="l" indent="0" marL="0">
@@ -3713,7 +3765,7 @@
           <a:ln/>
         </p:spPr>
         <p:txBody>
-          <a:bodyPr wrap="square" lIns="0" tIns="0" rIns="0" bIns="0" rtlCol="0" anchor="t"/>
+          <a:bodyPr wrap="none" lIns="0" tIns="0" rIns="0" bIns="0" rtlCol="0" anchor="t"/>
           <a:lstStyle/>
           <a:p>
             <a:pPr algn="l" indent="0" marL="0">
@@ -3824,6 +3876,10 @@
             <a:prstDash val="solid"/>
           </a:ln>
         </p:spPr>
+        <p:txBody>
+          <a:bodyPr/>
+          <a:p/>
+        </p:txBody>
       </p:sp>
       <p:sp>
         <p:nvSpPr>
@@ -3873,7 +3929,7 @@
           <a:ln/>
         </p:spPr>
         <p:txBody>
-          <a:bodyPr wrap="square" lIns="0" tIns="0" rIns="0" bIns="0" rtlCol="0" anchor="t"/>
+          <a:bodyPr wrap="none" lIns="0" tIns="0" rIns="0" bIns="0" rtlCol="0" anchor="t"/>
           <a:lstStyle/>
           <a:p>
             <a:pPr algn="l" indent="0" marL="0">
@@ -3915,7 +3971,7 @@
           <a:ln/>
         </p:spPr>
         <p:txBody>
-          <a:bodyPr wrap="square" lIns="0" tIns="0" rIns="0" bIns="0" rtlCol="0" anchor="t"/>
+          <a:bodyPr wrap="none" lIns="0" tIns="0" rIns="0" bIns="0" rtlCol="0" anchor="t"/>
           <a:lstStyle/>
           <a:p>
             <a:pPr algn="l" indent="0" marL="0">
@@ -3957,7 +4013,9 @@
           <a:ln/>
         </p:spPr>
         <p:txBody>
-          <a:bodyPr wrap="square" lIns="0" tIns="0" rIns="0" bIns="0" rtlCol="0" anchor="t"/>
+          <a:bodyPr wrap="square" lIns="0" tIns="0" rIns="0" bIns="0" rtlCol="0" anchor="t">
+            <a:normAutofit/>
+          </a:bodyPr>
           <a:lstStyle/>
           <a:p>
             <a:pPr algn="l" indent="0" marL="0">
@@ -4003,6 +4061,10 @@
             <a:prstDash val="solid"/>
           </a:ln>
         </p:spPr>
+        <p:txBody>
+          <a:bodyPr/>
+          <a:p/>
+        </p:txBody>
       </p:sp>
       <p:sp>
         <p:nvSpPr>
@@ -4026,6 +4088,10 @@
             <a:prstDash val="solid"/>
           </a:ln>
         </p:spPr>
+        <p:txBody>
+          <a:bodyPr/>
+          <a:p/>
+        </p:txBody>
       </p:sp>
       <p:sp>
         <p:nvSpPr>
@@ -4075,7 +4141,7 @@
           <a:ln/>
         </p:spPr>
         <p:txBody>
-          <a:bodyPr wrap="square" lIns="0" tIns="0" rIns="0" bIns="0" rtlCol="0" anchor="t"/>
+          <a:bodyPr wrap="none" lIns="0" tIns="0" rIns="0" bIns="0" rtlCol="0" anchor="t"/>
           <a:lstStyle/>
           <a:p>
             <a:pPr algn="l" indent="0" marL="0">
@@ -4117,7 +4183,7 @@
           <a:ln/>
         </p:spPr>
         <p:txBody>
-          <a:bodyPr wrap="square" lIns="0" tIns="0" rIns="0" bIns="0" rtlCol="0" anchor="t"/>
+          <a:bodyPr wrap="none" lIns="0" tIns="0" rIns="0" bIns="0" rtlCol="0" anchor="t"/>
           <a:lstStyle/>
           <a:p>
             <a:pPr algn="l" indent="0" marL="0">
@@ -4159,7 +4225,9 @@
           <a:ln/>
         </p:spPr>
         <p:txBody>
-          <a:bodyPr wrap="square" lIns="0" tIns="0" rIns="0" bIns="0" rtlCol="0" anchor="t"/>
+          <a:bodyPr wrap="square" lIns="0" tIns="0" rIns="0" bIns="0" rtlCol="0" anchor="t">
+            <a:normAutofit/>
+          </a:bodyPr>
           <a:lstStyle/>
           <a:p>
             <a:pPr algn="l" indent="0" marL="0">
@@ -4235,6 +4303,10 @@
             <a:prstDash val="solid"/>
           </a:ln>
         </p:spPr>
+        <p:txBody>
+          <a:bodyPr/>
+          <a:p/>
+        </p:txBody>
       </p:sp>
       <p:sp>
         <p:nvSpPr>
@@ -4258,6 +4330,10 @@
             <a:prstDash val="solid"/>
           </a:ln>
         </p:spPr>
+        <p:txBody>
+          <a:bodyPr/>
+          <a:p/>
+        </p:txBody>
       </p:sp>
       <p:sp>
         <p:nvSpPr>
@@ -4307,7 +4383,7 @@
           <a:ln/>
         </p:spPr>
         <p:txBody>
-          <a:bodyPr wrap="square" lIns="0" tIns="0" rIns="0" bIns="0" rtlCol="0" anchor="t"/>
+          <a:bodyPr wrap="none" lIns="0" tIns="0" rIns="0" bIns="0" rtlCol="0" anchor="t"/>
           <a:lstStyle/>
           <a:p>
             <a:pPr algn="l" indent="0" marL="0">
@@ -4349,7 +4425,7 @@
           <a:ln/>
         </p:spPr>
         <p:txBody>
-          <a:bodyPr wrap="square" lIns="0" tIns="0" rIns="0" bIns="0" rtlCol="0" anchor="t"/>
+          <a:bodyPr wrap="none" lIns="0" tIns="0" rIns="0" bIns="0" rtlCol="0" anchor="t"/>
           <a:lstStyle/>
           <a:p>
             <a:pPr algn="l" indent="0" marL="0">
@@ -4391,7 +4467,9 @@
           <a:ln/>
         </p:spPr>
         <p:txBody>
-          <a:bodyPr wrap="square" lIns="0" tIns="0" rIns="0" bIns="0" rtlCol="0" anchor="t"/>
+          <a:bodyPr wrap="square" lIns="0" tIns="0" rIns="0" bIns="0" rtlCol="0" anchor="t">
+            <a:normAutofit/>
+          </a:bodyPr>
           <a:lstStyle/>
           <a:p>
             <a:pPr algn="l" indent="0" marL="0">
@@ -4537,7 +4615,7 @@
           <a:ln/>
         </p:spPr>
         <p:txBody>
-          <a:bodyPr wrap="square" lIns="0" tIns="0" rIns="0" bIns="0" rtlCol="0" anchor="t"/>
+          <a:bodyPr wrap="none" lIns="0" tIns="0" rIns="0" bIns="0" rtlCol="0" anchor="t"/>
           <a:lstStyle/>
           <a:p>
             <a:pPr algn="l" indent="0" marL="0">
@@ -4582,7 +4660,7 @@
           <a:ln/>
         </p:spPr>
         <p:txBody>
-          <a:bodyPr wrap="square" lIns="0" tIns="0" rIns="0" bIns="0" rtlCol="0" anchor="t"/>
+          <a:bodyPr wrap="none" lIns="0" tIns="0" rIns="0" bIns="0" rtlCol="0" anchor="t"/>
           <a:lstStyle/>
           <a:p>
             <a:pPr algn="l" indent="0" marL="0">
@@ -4627,7 +4705,7 @@
           <a:ln/>
         </p:spPr>
         <p:txBody>
-          <a:bodyPr wrap="square" lIns="0" tIns="0" rIns="0" bIns="0" rtlCol="0" anchor="t"/>
+          <a:bodyPr wrap="none" lIns="0" tIns="0" rIns="0" bIns="0" rtlCol="0" anchor="t"/>
           <a:lstStyle/>
           <a:p>
             <a:pPr algn="l" indent="0" marL="0">
@@ -4732,7 +4810,9 @@
           <a:ln/>
         </p:spPr>
         <p:txBody>
-          <a:bodyPr wrap="square" lIns="0" tIns="0" rIns="0" bIns="0" rtlCol="0" anchor="t"/>
+          <a:bodyPr wrap="square" lIns="0" tIns="0" rIns="0" bIns="0" rtlCol="0" anchor="t">
+            <a:normAutofit/>
+          </a:bodyPr>
           <a:lstStyle/>
           <a:p>
             <a:pPr algn="l" indent="0" marL="0">
@@ -4778,6 +4858,10 @@
             <a:prstDash val="solid"/>
           </a:ln>
         </p:spPr>
+        <p:txBody>
+          <a:bodyPr/>
+          <a:p/>
+        </p:txBody>
       </p:sp>
       <p:sp>
         <p:nvSpPr>
@@ -4827,7 +4911,7 @@
           <a:ln/>
         </p:spPr>
         <p:txBody>
-          <a:bodyPr wrap="square" lIns="0" tIns="0" rIns="0" bIns="0" rtlCol="0" anchor="t"/>
+          <a:bodyPr wrap="none" lIns="0" tIns="0" rIns="0" bIns="0" rtlCol="0" anchor="t"/>
           <a:lstStyle/>
           <a:p>
             <a:pPr algn="l" indent="0" marL="0">
@@ -4869,7 +4953,7 @@
           <a:ln/>
         </p:spPr>
         <p:txBody>
-          <a:bodyPr wrap="square" lIns="0" tIns="0" rIns="0" bIns="0" rtlCol="0" anchor="t"/>
+          <a:bodyPr wrap="none" lIns="0" tIns="0" rIns="0" bIns="0" rtlCol="0" anchor="t"/>
           <a:lstStyle/>
           <a:p>
             <a:pPr algn="l" indent="0" marL="0">
@@ -4915,6 +4999,10 @@
             <a:prstDash val="solid"/>
           </a:ln>
         </p:spPr>
+        <p:txBody>
+          <a:bodyPr/>
+          <a:p/>
+        </p:txBody>
       </p:sp>
       <p:sp>
         <p:nvSpPr>
@@ -4964,7 +5052,7 @@
           <a:ln/>
         </p:spPr>
         <p:txBody>
-          <a:bodyPr wrap="square" lIns="0" tIns="0" rIns="0" bIns="0" rtlCol="0" anchor="t"/>
+          <a:bodyPr wrap="none" lIns="0" tIns="0" rIns="0" bIns="0" rtlCol="0" anchor="t"/>
           <a:lstStyle/>
           <a:p>
             <a:pPr algn="l" indent="0" marL="0">
@@ -5006,7 +5094,7 @@
           <a:ln/>
         </p:spPr>
         <p:txBody>
-          <a:bodyPr wrap="square" lIns="0" tIns="0" rIns="0" bIns="0" rtlCol="0" anchor="t"/>
+          <a:bodyPr wrap="none" lIns="0" tIns="0" rIns="0" bIns="0" rtlCol="0" anchor="t"/>
           <a:lstStyle/>
           <a:p>
             <a:pPr algn="l" indent="0" marL="0">
@@ -5052,6 +5140,10 @@
             <a:prstDash val="solid"/>
           </a:ln>
         </p:spPr>
+        <p:txBody>
+          <a:bodyPr/>
+          <a:p/>
+        </p:txBody>
       </p:sp>
       <p:sp>
         <p:nvSpPr>
@@ -5101,7 +5193,7 @@
           <a:ln/>
         </p:spPr>
         <p:txBody>
-          <a:bodyPr wrap="square" lIns="0" tIns="0" rIns="0" bIns="0" rtlCol="0" anchor="t"/>
+          <a:bodyPr wrap="none" lIns="0" tIns="0" rIns="0" bIns="0" rtlCol="0" anchor="t"/>
           <a:lstStyle/>
           <a:p>
             <a:pPr algn="l" indent="0" marL="0">
@@ -5143,7 +5235,7 @@
           <a:ln/>
         </p:spPr>
         <p:txBody>
-          <a:bodyPr wrap="square" lIns="0" tIns="0" rIns="0" bIns="0" rtlCol="0" anchor="t"/>
+          <a:bodyPr wrap="none" lIns="0" tIns="0" rIns="0" bIns="0" rtlCol="0" anchor="t"/>
           <a:lstStyle/>
           <a:p>
             <a:pPr algn="l" indent="0" marL="0">

--- a/decks/alert-design/alert-design.pptx
+++ b/decks/alert-design/alert-design.pptx
@@ -1324,6 +1324,104 @@
           <a:ln/>
         </p:spPr>
         <p:txBody>
+          <a:bodyPr wrap="none" lIns="0" tIns="0" rIns="0" bIns="0" rtlCol="0" anchor="t"/>
+          <a:lstStyle/>
+          <a:p>
+            <a:pPr algn="l" indent="0" marL="0">
+              <a:lnSpc>
+                <a:spcPts val="6399"/>
+              </a:lnSpc>
+              <a:spcAft>
+                <a:spcPts val="3466"/>
+              </a:spcAft>
+              <a:buNone/>
+            </a:pPr>
+            <a:r>
+              <a:rPr lang="en-US" sz="5333" dirty="0">
+                <a:solidFill>
+                  <a:srgbClr val="0A0A0A"/>
+                </a:solidFill>
+                <a:latin typeface="Arimo" pitchFamily="34" charset="0"/>
+                <a:ea typeface="Arimo" pitchFamily="34" charset="-122"/>
+                <a:cs typeface="Arimo" pitchFamily="34" charset="-120"/>
+              </a:rPr>
+              <a:t>Alert design:</a:t>
+            </a:r>
+            <a:endParaRPr lang="en-US" sz="5333" dirty="0"/>
+          </a:p>
+          <a:p>
+            <a:pPr algn="l" indent="0" marL="0">
+              <a:lnSpc>
+                <a:spcPts val="6399"/>
+              </a:lnSpc>
+              <a:spcAft>
+                <a:spcPts val="3466"/>
+              </a:spcAft>
+              <a:buNone/>
+            </a:pPr>
+            <a:r>
+              <a:rPr lang="en-US" sz="5333" dirty="0">
+                <a:solidFill>
+                  <a:srgbClr val="0A0A0A"/>
+                </a:solidFill>
+                <a:latin typeface="Arimo" pitchFamily="34" charset="0"/>
+                <a:ea typeface="Arimo" pitchFamily="34" charset="-122"/>
+                <a:cs typeface="Arimo" pitchFamily="34" charset="-120"/>
+              </a:rPr>
+              <a:t>what deserves a page</a:t>
+            </a:r>
+            <a:endParaRPr lang="en-US" sz="5333" dirty="0"/>
+          </a:p>
+        </p:txBody>
+      </p:sp>
+      <p:sp>
+        <p:nvSpPr>
+          <p:cNvPr id="5" name="Text 3"/>
+          <p:cNvSpPr/>
+          <p:nvPr/>
+        </p:nvSpPr>
+        <p:spPr>
+          <a:xfrm>
+            <a:off x="643174" y="3542506"/>
+            <a:ext cx="10902605" cy="1308497"/>
+          </a:xfrm>
+          <a:prstGeom prst="rect">
+            <a:avLst/>
+          </a:prstGeom>
+          <a:solidFill>
+            <a:srgbClr val="0A0A0A"/>
+          </a:solidFill>
+          <a:ln/>
+        </p:spPr>
+        <p:txBody>
+          <a:bodyPr wrap="square" rtlCol="0" anchor="ctr"/>
+          <a:lstStyle/>
+          <a:p>
+            <a:pPr indent="0" marL="0">
+              <a:buNone/>
+            </a:pPr>
+            <a:endParaRPr lang="en-US" dirty="0"/>
+          </a:p>
+        </p:txBody>
+      </p:sp>
+      <p:sp>
+        <p:nvSpPr>
+          <p:cNvPr id="6" name="Text 4"/>
+          <p:cNvSpPr/>
+          <p:nvPr/>
+        </p:nvSpPr>
+        <p:spPr>
+          <a:xfrm>
+            <a:off x="913973" y="3779441"/>
+            <a:ext cx="10568226" cy="834628"/>
+          </a:xfrm>
+          <a:prstGeom prst="rect">
+            <a:avLst/>
+          </a:prstGeom>
+          <a:noFill/>
+          <a:ln/>
+        </p:spPr>
+        <p:txBody>
           <a:bodyPr wrap="square" lIns="0" tIns="0" rIns="0" bIns="0" rtlCol="0" anchor="t">
             <a:normAutofit/>
           </a:bodyPr>
@@ -1331,61 +1429,35 @@
           <a:p>
             <a:pPr algn="l" indent="0" marL="0">
               <a:lnSpc>
-                <a:spcPts val="6399"/>
-              </a:lnSpc>
-              <a:spcAft>
-                <a:spcPts val="3466"/>
-              </a:spcAft>
-              <a:buNone/>
-            </a:pPr>
-            <a:r>
-              <a:rPr lang="en-US" sz="5333" dirty="0">
-                <a:solidFill>
-                  <a:srgbClr val="0A0A0A"/>
-                </a:solidFill>
-                <a:latin typeface="Arimo" pitchFamily="34" charset="0"/>
-                <a:ea typeface="Arimo" pitchFamily="34" charset="-122"/>
-                <a:cs typeface="Arimo" pitchFamily="34" charset="-120"/>
-              </a:rPr>
-              <a:t>Alert design:</a:t>
-            </a:r>
-            <a:endParaRPr lang="en-US" sz="5333" dirty="0"/>
-          </a:p>
-          <a:p>
-            <a:pPr algn="l" indent="0" marL="0">
-              <a:lnSpc>
-                <a:spcPts val="6399"/>
-              </a:lnSpc>
-              <a:spcAft>
-                <a:spcPts val="3466"/>
-              </a:spcAft>
-              <a:buNone/>
-            </a:pPr>
-            <a:r>
-              <a:rPr lang="en-US" sz="5333" dirty="0">
-                <a:solidFill>
-                  <a:srgbClr val="0A0A0A"/>
-                </a:solidFill>
-                <a:latin typeface="Arimo" pitchFamily="34" charset="0"/>
-                <a:ea typeface="Arimo" pitchFamily="34" charset="-122"/>
-                <a:cs typeface="Arimo" pitchFamily="34" charset="-120"/>
-              </a:rPr>
-              <a:t>what deserves a page</a:t>
-            </a:r>
-            <a:endParaRPr lang="en-US" sz="5333" dirty="0"/>
-          </a:p>
-        </p:txBody>
-      </p:sp>
-      <p:sp>
-        <p:nvSpPr>
-          <p:cNvPr id="5" name="Text 3"/>
-          <p:cNvSpPr/>
-          <p:nvPr/>
-        </p:nvSpPr>
-        <p:spPr>
-          <a:xfrm>
-            <a:off x="643174" y="3542506"/>
-            <a:ext cx="10902605" cy="1308497"/>
+                <a:spcPts val="3286"/>
+              </a:lnSpc>
+              <a:buNone/>
+            </a:pPr>
+            <a:r>
+              <a:rPr lang="en-US" sz="2266" dirty="0">
+                <a:solidFill>
+                  <a:srgbClr val="FFFFFF"/>
+                </a:solidFill>
+                <a:latin typeface="Arimo" pitchFamily="34" charset="0"/>
+                <a:ea typeface="Arimo" pitchFamily="34" charset="-122"/>
+                <a:cs typeface="Arimo" pitchFamily="34" charset="-120"/>
+              </a:rPr>
+              <a:t>A page wakes a human. The bar is not whether the alert is true. The bar is whether it is worth someone's night.</a:t>
+            </a:r>
+            <a:endParaRPr lang="en-US" sz="2266" dirty="0"/>
+          </a:p>
+        </p:txBody>
+      </p:sp>
+      <p:sp>
+        <p:nvSpPr>
+          <p:cNvPr id="7" name="Text 5"/>
+          <p:cNvSpPr/>
+          <p:nvPr/>
+        </p:nvSpPr>
+        <p:spPr>
+          <a:xfrm>
+            <a:off x="643174" y="5769570"/>
+            <a:ext cx="10902605" cy="25400"/>
           </a:xfrm>
           <a:prstGeom prst="rect">
             <a:avLst/>
@@ -1408,80 +1480,6 @@
       </p:sp>
       <p:sp>
         <p:nvSpPr>
-          <p:cNvPr id="6" name="Text 4"/>
-          <p:cNvSpPr/>
-          <p:nvPr/>
-        </p:nvSpPr>
-        <p:spPr>
-          <a:xfrm>
-            <a:off x="913973" y="3779441"/>
-            <a:ext cx="10568226" cy="834628"/>
-          </a:xfrm>
-          <a:prstGeom prst="rect">
-            <a:avLst/>
-          </a:prstGeom>
-          <a:noFill/>
-          <a:ln/>
-        </p:spPr>
-        <p:txBody>
-          <a:bodyPr wrap="square" lIns="0" tIns="0" rIns="0" bIns="0" rtlCol="0" anchor="t">
-            <a:normAutofit/>
-          </a:bodyPr>
-          <a:lstStyle/>
-          <a:p>
-            <a:pPr algn="l" indent="0" marL="0">
-              <a:lnSpc>
-                <a:spcPts val="3286"/>
-              </a:lnSpc>
-              <a:buNone/>
-            </a:pPr>
-            <a:r>
-              <a:rPr lang="en-US" sz="2266" dirty="0">
-                <a:solidFill>
-                  <a:srgbClr val="FFFFFF"/>
-                </a:solidFill>
-                <a:latin typeface="Arimo" pitchFamily="34" charset="0"/>
-                <a:ea typeface="Arimo" pitchFamily="34" charset="-122"/>
-                <a:cs typeface="Arimo" pitchFamily="34" charset="-120"/>
-              </a:rPr>
-              <a:t>A page wakes a human. The bar is not whether the alert is true. The bar is whether it is worth someone's night.</a:t>
-            </a:r>
-            <a:endParaRPr lang="en-US" sz="2266" dirty="0"/>
-          </a:p>
-        </p:txBody>
-      </p:sp>
-      <p:sp>
-        <p:nvSpPr>
-          <p:cNvPr id="7" name="Text 5"/>
-          <p:cNvSpPr/>
-          <p:nvPr/>
-        </p:nvSpPr>
-        <p:spPr>
-          <a:xfrm>
-            <a:off x="643174" y="5769570"/>
-            <a:ext cx="10902605" cy="25400"/>
-          </a:xfrm>
-          <a:prstGeom prst="rect">
-            <a:avLst/>
-          </a:prstGeom>
-          <a:solidFill>
-            <a:srgbClr val="0A0A0A"/>
-          </a:solidFill>
-          <a:ln/>
-        </p:spPr>
-        <p:txBody>
-          <a:bodyPr wrap="square" rtlCol="0" anchor="ctr"/>
-          <a:lstStyle/>
-          <a:p>
-            <a:pPr indent="0" marL="0">
-              <a:buNone/>
-            </a:pPr>
-            <a:endParaRPr lang="en-US" dirty="0"/>
-          </a:p>
-        </p:txBody>
-      </p:sp>
-      <p:sp>
-        <p:nvSpPr>
           <p:cNvPr id="8" name="Text 6"/>
           <p:cNvSpPr/>
           <p:nvPr/>
@@ -1498,7 +1496,7 @@
           <a:ln/>
         </p:spPr>
         <p:txBody>
-          <a:bodyPr wrap="square" lIns="0" tIns="135450" rIns="0" bIns="0" rtlCol="0" anchor="t"/>
+          <a:bodyPr wrap="none" lIns="0" tIns="135450" rIns="0" bIns="0" rtlCol="0" anchor="t"/>
           <a:lstStyle/>
           <a:p>
             <a:pPr algn="l" indent="0" marL="0">
@@ -2492,7 +2490,7 @@
           <a:ln/>
         </p:spPr>
         <p:txBody>
-          <a:bodyPr wrap="square" lIns="0" tIns="67725" rIns="0" bIns="0" rtlCol="0" anchor="t"/>
+          <a:bodyPr wrap="none" lIns="0" tIns="67725" rIns="0" bIns="0" rtlCol="0" anchor="t"/>
           <a:lstStyle/>
           <a:p>
             <a:pPr algn="l" indent="0" marL="0">
@@ -3601,7 +3599,7 @@
           <a:ln/>
         </p:spPr>
         <p:txBody>
-          <a:bodyPr wrap="square" lIns="0" tIns="67725" rIns="0" bIns="0" rtlCol="0" anchor="t"/>
+          <a:bodyPr wrap="none" lIns="0" tIns="67725" rIns="0" bIns="0" rtlCol="0" anchor="t"/>
           <a:lstStyle/>
           <a:p>
             <a:pPr algn="l" indent="0" marL="0">
@@ -4541,7 +4539,7 @@
           <a:ln/>
         </p:spPr>
         <p:txBody>
-          <a:bodyPr wrap="square" lIns="0" tIns="67725" rIns="0" bIns="0" rtlCol="0" anchor="t"/>
+          <a:bodyPr wrap="none" lIns="0" tIns="67725" rIns="0" bIns="0" rtlCol="0" anchor="t"/>
           <a:lstStyle/>
           <a:p>
             <a:pPr algn="l" indent="0" marL="0">
@@ -5307,7 +5305,7 @@
           <a:ln/>
         </p:spPr>
         <p:txBody>
-          <a:bodyPr wrap="square" lIns="0" tIns="67725" rIns="0" bIns="0" rtlCol="0" anchor="t"/>
+          <a:bodyPr wrap="none" lIns="0" tIns="67725" rIns="0" bIns="0" rtlCol="0" anchor="t"/>
           <a:lstStyle/>
           <a:p>
             <a:pPr algn="l" indent="0" marL="0">
